--- a/data/data_analysis/CAGR_plots.pptx
+++ b/data/data_analysis/CAGR_plots.pptx
@@ -107,6 +107,11 @@
       </a:defRPr>
     </a:lvl9pPr>
   </p:defaultTextStyle>
+  <p:extLst>
+    <p:ext uri="{EFAFB233-063F-42B5-8137-9DF3F51BA10A}">
+      <p15:sldGuideLst xmlns:p15="http://schemas.microsoft.com/office/powerpoint/2012/main"/>
+    </p:ext>
+  </p:extLst>
 </p:presentation>
 </file>
 
@@ -257,7 +262,7 @@
           <a:p>
             <a:fld id="{25C820A4-0B52-43A8-957A-6471D3E9C03A}" type="datetimeFigureOut">
               <a:rPr lang="en-US" smtClean="0"/>
-              <a:t>1/28/2026</a:t>
+              <a:t>7/10/2026</a:t>
             </a:fld>
             <a:endParaRPr lang="en-US"/>
           </a:p>
@@ -455,7 +460,7 @@
           <a:p>
             <a:fld id="{25C820A4-0B52-43A8-957A-6471D3E9C03A}" type="datetimeFigureOut">
               <a:rPr lang="en-US" smtClean="0"/>
-              <a:t>1/28/2026</a:t>
+              <a:t>7/10/2026</a:t>
             </a:fld>
             <a:endParaRPr lang="en-US"/>
           </a:p>
@@ -663,7 +668,7 @@
           <a:p>
             <a:fld id="{25C820A4-0B52-43A8-957A-6471D3E9C03A}" type="datetimeFigureOut">
               <a:rPr lang="en-US" smtClean="0"/>
-              <a:t>1/28/2026</a:t>
+              <a:t>7/10/2026</a:t>
             </a:fld>
             <a:endParaRPr lang="en-US"/>
           </a:p>
@@ -861,7 +866,7 @@
           <a:p>
             <a:fld id="{25C820A4-0B52-43A8-957A-6471D3E9C03A}" type="datetimeFigureOut">
               <a:rPr lang="en-US" smtClean="0"/>
-              <a:t>1/28/2026</a:t>
+              <a:t>7/10/2026</a:t>
             </a:fld>
             <a:endParaRPr lang="en-US"/>
           </a:p>
@@ -1136,7 +1141,7 @@
           <a:p>
             <a:fld id="{25C820A4-0B52-43A8-957A-6471D3E9C03A}" type="datetimeFigureOut">
               <a:rPr lang="en-US" smtClean="0"/>
-              <a:t>1/28/2026</a:t>
+              <a:t>7/10/2026</a:t>
             </a:fld>
             <a:endParaRPr lang="en-US"/>
           </a:p>
@@ -1401,7 +1406,7 @@
           <a:p>
             <a:fld id="{25C820A4-0B52-43A8-957A-6471D3E9C03A}" type="datetimeFigureOut">
               <a:rPr lang="en-US" smtClean="0"/>
-              <a:t>1/28/2026</a:t>
+              <a:t>7/10/2026</a:t>
             </a:fld>
             <a:endParaRPr lang="en-US"/>
           </a:p>
@@ -1813,7 +1818,7 @@
           <a:p>
             <a:fld id="{25C820A4-0B52-43A8-957A-6471D3E9C03A}" type="datetimeFigureOut">
               <a:rPr lang="en-US" smtClean="0"/>
-              <a:t>1/28/2026</a:t>
+              <a:t>7/10/2026</a:t>
             </a:fld>
             <a:endParaRPr lang="en-US"/>
           </a:p>
@@ -1954,7 +1959,7 @@
           <a:p>
             <a:fld id="{25C820A4-0B52-43A8-957A-6471D3E9C03A}" type="datetimeFigureOut">
               <a:rPr lang="en-US" smtClean="0"/>
-              <a:t>1/28/2026</a:t>
+              <a:t>7/10/2026</a:t>
             </a:fld>
             <a:endParaRPr lang="en-US"/>
           </a:p>
@@ -2067,7 +2072,7 @@
           <a:p>
             <a:fld id="{25C820A4-0B52-43A8-957A-6471D3E9C03A}" type="datetimeFigureOut">
               <a:rPr lang="en-US" smtClean="0"/>
-              <a:t>1/28/2026</a:t>
+              <a:t>7/10/2026</a:t>
             </a:fld>
             <a:endParaRPr lang="en-US"/>
           </a:p>
@@ -2378,7 +2383,7 @@
           <a:p>
             <a:fld id="{25C820A4-0B52-43A8-957A-6471D3E9C03A}" type="datetimeFigureOut">
               <a:rPr lang="en-US" smtClean="0"/>
-              <a:t>1/28/2026</a:t>
+              <a:t>7/10/2026</a:t>
             </a:fld>
             <a:endParaRPr lang="en-US"/>
           </a:p>
@@ -2666,7 +2671,7 @@
           <a:p>
             <a:fld id="{25C820A4-0B52-43A8-957A-6471D3E9C03A}" type="datetimeFigureOut">
               <a:rPr lang="en-US" smtClean="0"/>
-              <a:t>1/28/2026</a:t>
+              <a:t>7/10/2026</a:t>
             </a:fld>
             <a:endParaRPr lang="en-US"/>
           </a:p>
@@ -2907,7 +2912,7 @@
           <a:p>
             <a:fld id="{25C820A4-0B52-43A8-957A-6471D3E9C03A}" type="datetimeFigureOut">
               <a:rPr lang="en-US" smtClean="0"/>
-              <a:t>1/28/2026</a:t>
+              <a:t>7/10/2026</a:t>
             </a:fld>
             <a:endParaRPr lang="en-US"/>
           </a:p>
@@ -3326,10 +3331,10 @@
       </p:grpSpPr>
       <p:pic>
         <p:nvPicPr>
-          <p:cNvPr id="19" name="Picture 18">
-            <a:extLst>
-              <a:ext uri="{FF2B5EF4-FFF2-40B4-BE49-F238E27FC236}">
-                <a16:creationId xmlns:a16="http://schemas.microsoft.com/office/drawing/2014/main" id="{F4C3A95C-640A-D36D-0494-73BE2292C73D}"/>
+          <p:cNvPr id="12" name="Picture 11">
+            <a:extLst>
+              <a:ext uri="{FF2B5EF4-FFF2-40B4-BE49-F238E27FC236}">
+                <a16:creationId xmlns:a16="http://schemas.microsoft.com/office/drawing/2014/main" id="{3D2589A5-11CD-F23F-AA53-D266B0C9DF59}"/>
               </a:ext>
             </a:extLst>
           </p:cNvPr>
@@ -3346,8 +3351,8 @@
         </p:blipFill>
         <p:spPr>
           <a:xfrm>
-            <a:off x="2095162" y="966645"/>
-            <a:ext cx="4267796" cy="2505425"/>
+            <a:off x="0" y="0"/>
+            <a:ext cx="4096322" cy="2429214"/>
           </a:xfrm>
           <a:prstGeom prst="rect">
             <a:avLst/>
@@ -3356,10 +3361,10 @@
       </p:pic>
       <p:pic>
         <p:nvPicPr>
-          <p:cNvPr id="6" name="Picture 5">
-            <a:extLst>
-              <a:ext uri="{FF2B5EF4-FFF2-40B4-BE49-F238E27FC236}">
-                <a16:creationId xmlns:a16="http://schemas.microsoft.com/office/drawing/2014/main" id="{5294C91C-9A3A-85AE-C685-E702F935980C}"/>
+          <p:cNvPr id="8" name="Picture 7">
+            <a:extLst>
+              <a:ext uri="{FF2B5EF4-FFF2-40B4-BE49-F238E27FC236}">
+                <a16:creationId xmlns:a16="http://schemas.microsoft.com/office/drawing/2014/main" id="{4274740D-E5EE-65BC-730C-0D2FD5E25A1A}"/>
               </a:ext>
             </a:extLst>
           </p:cNvPr>
@@ -3370,201 +3375,18 @@
         </p:nvPicPr>
         <p:blipFill>
           <a:blip r:embed="rId3"/>
-          <a:srcRect l="83369" b="57878"/>
           <a:stretch>
             <a:fillRect/>
           </a:stretch>
         </p:blipFill>
         <p:spPr>
           <a:xfrm>
-            <a:off x="5400566" y="1060953"/>
-            <a:ext cx="880013" cy="996447"/>
+            <a:off x="599730" y="53175"/>
+            <a:ext cx="1028844" cy="1095528"/>
           </a:xfrm>
           <a:prstGeom prst="rect">
             <a:avLst/>
           </a:prstGeom>
-        </p:spPr>
-      </p:pic>
-      <p:sp>
-        <p:nvSpPr>
-          <p:cNvPr id="9" name="Rectangle 8">
-            <a:extLst>
-              <a:ext uri="{FF2B5EF4-FFF2-40B4-BE49-F238E27FC236}">
-                <a16:creationId xmlns:a16="http://schemas.microsoft.com/office/drawing/2014/main" id="{6CADB7F4-E5CA-970D-F9CC-372093EF0455}"/>
-              </a:ext>
-            </a:extLst>
-          </p:cNvPr>
-          <p:cNvSpPr/>
-          <p:nvPr/>
-        </p:nvSpPr>
-        <p:spPr>
-          <a:xfrm>
-            <a:off x="2892287" y="2586682"/>
-            <a:ext cx="3299791" cy="386819"/>
-          </a:xfrm>
-          <a:prstGeom prst="rect">
-            <a:avLst/>
-          </a:prstGeom>
-          <a:noFill/>
-          <a:ln>
-            <a:solidFill>
-              <a:schemeClr val="bg2">
-                <a:lumMod val="75000"/>
-              </a:schemeClr>
-            </a:solidFill>
-            <a:prstDash val="lgDash"/>
-          </a:ln>
-        </p:spPr>
-        <p:style>
-          <a:lnRef idx="2">
-            <a:schemeClr val="accent1">
-              <a:shade val="15000"/>
-            </a:schemeClr>
-          </a:lnRef>
-          <a:fillRef idx="1">
-            <a:schemeClr val="accent1"/>
-          </a:fillRef>
-          <a:effectRef idx="0">
-            <a:schemeClr val="accent1"/>
-          </a:effectRef>
-          <a:fontRef idx="minor">
-            <a:schemeClr val="lt1"/>
-          </a:fontRef>
-        </p:style>
-        <p:txBody>
-          <a:bodyPr rtlCol="0" anchor="ctr"/>
-          <a:lstStyle/>
-          <a:p>
-            <a:pPr algn="ctr"/>
-            <a:endParaRPr lang="en-US" dirty="0"/>
-          </a:p>
-        </p:txBody>
-      </p:sp>
-      <p:cxnSp>
-        <p:nvCxnSpPr>
-          <p:cNvPr id="11" name="Straight Connector 10">
-            <a:extLst>
-              <a:ext uri="{FF2B5EF4-FFF2-40B4-BE49-F238E27FC236}">
-                <a16:creationId xmlns:a16="http://schemas.microsoft.com/office/drawing/2014/main" id="{E09784D9-1593-0D52-D5E0-EB2A5C58CED0}"/>
-              </a:ext>
-            </a:extLst>
-          </p:cNvPr>
-          <p:cNvCxnSpPr>
-            <a:cxnSpLocks/>
-          </p:cNvCxnSpPr>
-          <p:nvPr/>
-        </p:nvCxnSpPr>
-        <p:spPr>
-          <a:xfrm>
-            <a:off x="2892287" y="2973501"/>
-            <a:ext cx="144453" cy="2405807"/>
-          </a:xfrm>
-          <a:prstGeom prst="line">
-            <a:avLst/>
-          </a:prstGeom>
-          <a:ln>
-            <a:solidFill>
-              <a:schemeClr val="bg2">
-                <a:lumMod val="75000"/>
-              </a:schemeClr>
-            </a:solidFill>
-          </a:ln>
-        </p:spPr>
-        <p:style>
-          <a:lnRef idx="2">
-            <a:schemeClr val="accent1"/>
-          </a:lnRef>
-          <a:fillRef idx="0">
-            <a:schemeClr val="accent1"/>
-          </a:fillRef>
-          <a:effectRef idx="1">
-            <a:schemeClr val="accent1"/>
-          </a:effectRef>
-          <a:fontRef idx="minor">
-            <a:schemeClr val="tx1"/>
-          </a:fontRef>
-        </p:style>
-      </p:cxnSp>
-      <p:cxnSp>
-        <p:nvCxnSpPr>
-          <p:cNvPr id="15" name="Straight Connector 14">
-            <a:extLst>
-              <a:ext uri="{FF2B5EF4-FFF2-40B4-BE49-F238E27FC236}">
-                <a16:creationId xmlns:a16="http://schemas.microsoft.com/office/drawing/2014/main" id="{24DAD20B-0989-58D4-DF91-76FB09E2A53F}"/>
-              </a:ext>
-            </a:extLst>
-          </p:cNvPr>
-          <p:cNvCxnSpPr>
-            <a:cxnSpLocks/>
-          </p:cNvCxnSpPr>
-          <p:nvPr/>
-        </p:nvCxnSpPr>
-        <p:spPr>
-          <a:xfrm flipH="1">
-            <a:off x="6096000" y="2973501"/>
-            <a:ext cx="96078" cy="2405807"/>
-          </a:xfrm>
-          <a:prstGeom prst="line">
-            <a:avLst/>
-          </a:prstGeom>
-          <a:ln>
-            <a:solidFill>
-              <a:schemeClr val="bg2">
-                <a:lumMod val="75000"/>
-              </a:schemeClr>
-            </a:solidFill>
-          </a:ln>
-        </p:spPr>
-        <p:style>
-          <a:lnRef idx="2">
-            <a:schemeClr val="accent1"/>
-          </a:lnRef>
-          <a:fillRef idx="0">
-            <a:schemeClr val="accent1"/>
-          </a:fillRef>
-          <a:effectRef idx="1">
-            <a:schemeClr val="accent1"/>
-          </a:effectRef>
-          <a:fontRef idx="minor">
-            <a:schemeClr val="tx1"/>
-          </a:fontRef>
-        </p:style>
-      </p:cxnSp>
-      <p:pic>
-        <p:nvPicPr>
-          <p:cNvPr id="21" name="Picture 20">
-            <a:extLst>
-              <a:ext uri="{FF2B5EF4-FFF2-40B4-BE49-F238E27FC236}">
-                <a16:creationId xmlns:a16="http://schemas.microsoft.com/office/drawing/2014/main" id="{32659C77-616D-9FBB-F9CE-F58D266608ED}"/>
-              </a:ext>
-            </a:extLst>
-          </p:cNvPr>
-          <p:cNvPicPr>
-            <a:picLocks noChangeAspect="1"/>
-          </p:cNvPicPr>
-          <p:nvPr/>
-        </p:nvPicPr>
-        <p:blipFill>
-          <a:blip r:embed="rId4"/>
-          <a:stretch>
-            <a:fillRect/>
-          </a:stretch>
-        </p:blipFill>
-        <p:spPr>
-          <a:xfrm>
-            <a:off x="3036740" y="3634049"/>
-            <a:ext cx="3059260" cy="1745260"/>
-          </a:xfrm>
-          <a:prstGeom prst="rect">
-            <a:avLst/>
-          </a:prstGeom>
-          <a:ln>
-            <a:solidFill>
-              <a:schemeClr val="bg2">
-                <a:lumMod val="75000"/>
-              </a:schemeClr>
-            </a:solidFill>
-          </a:ln>
         </p:spPr>
       </p:pic>
     </p:spTree>
@@ -3599,10 +3421,10 @@
       </p:grpSpPr>
       <p:pic>
         <p:nvPicPr>
-          <p:cNvPr id="16" name="Picture 15">
-            <a:extLst>
-              <a:ext uri="{FF2B5EF4-FFF2-40B4-BE49-F238E27FC236}">
-                <a16:creationId xmlns:a16="http://schemas.microsoft.com/office/drawing/2014/main" id="{6A1A7413-694A-85AE-8360-7FB925BC0C0F}"/>
+          <p:cNvPr id="5" name="Picture 4">
+            <a:extLst>
+              <a:ext uri="{FF2B5EF4-FFF2-40B4-BE49-F238E27FC236}">
+                <a16:creationId xmlns:a16="http://schemas.microsoft.com/office/drawing/2014/main" id="{BA566C0F-7EFA-8053-F5AB-99F156488E8D}"/>
               </a:ext>
             </a:extLst>
           </p:cNvPr>
@@ -3619,8 +3441,8 @@
         </p:blipFill>
         <p:spPr>
           <a:xfrm>
-            <a:off x="1323108" y="282348"/>
-            <a:ext cx="4372585" cy="2419688"/>
+            <a:off x="0" y="0"/>
+            <a:ext cx="4134427" cy="2429214"/>
           </a:xfrm>
           <a:prstGeom prst="rect">
             <a:avLst/>
@@ -3629,10 +3451,10 @@
       </p:pic>
       <p:pic>
         <p:nvPicPr>
-          <p:cNvPr id="6" name="Picture 5">
-            <a:extLst>
-              <a:ext uri="{FF2B5EF4-FFF2-40B4-BE49-F238E27FC236}">
-                <a16:creationId xmlns:a16="http://schemas.microsoft.com/office/drawing/2014/main" id="{4282EC1E-42A4-97E9-46CE-8B1F23FDCC9C}"/>
+          <p:cNvPr id="3" name="Picture 2">
+            <a:extLst>
+              <a:ext uri="{FF2B5EF4-FFF2-40B4-BE49-F238E27FC236}">
+                <a16:creationId xmlns:a16="http://schemas.microsoft.com/office/drawing/2014/main" id="{021CE6A8-84F5-92F6-653D-B238E05F2F0F}"/>
               </a:ext>
             </a:extLst>
           </p:cNvPr>
@@ -3643,201 +3465,18 @@
         </p:nvPicPr>
         <p:blipFill>
           <a:blip r:embed="rId3"/>
-          <a:srcRect l="83369" b="57878"/>
           <a:stretch>
             <a:fillRect/>
           </a:stretch>
         </p:blipFill>
         <p:spPr>
           <a:xfrm>
-            <a:off x="4634447" y="305036"/>
-            <a:ext cx="880013" cy="996447"/>
+            <a:off x="632164" y="61081"/>
+            <a:ext cx="1028844" cy="1095528"/>
           </a:xfrm>
           <a:prstGeom prst="rect">
             <a:avLst/>
           </a:prstGeom>
-        </p:spPr>
-      </p:pic>
-      <p:sp>
-        <p:nvSpPr>
-          <p:cNvPr id="9" name="Rectangle 8">
-            <a:extLst>
-              <a:ext uri="{FF2B5EF4-FFF2-40B4-BE49-F238E27FC236}">
-                <a16:creationId xmlns:a16="http://schemas.microsoft.com/office/drawing/2014/main" id="{432D5E26-E159-6C7D-A200-156C0F7695A0}"/>
-              </a:ext>
-            </a:extLst>
-          </p:cNvPr>
-          <p:cNvSpPr/>
-          <p:nvPr/>
-        </p:nvSpPr>
-        <p:spPr>
-          <a:xfrm>
-            <a:off x="2015620" y="1911179"/>
-            <a:ext cx="3561396" cy="477404"/>
-          </a:xfrm>
-          <a:prstGeom prst="rect">
-            <a:avLst/>
-          </a:prstGeom>
-          <a:noFill/>
-          <a:ln>
-            <a:solidFill>
-              <a:schemeClr val="bg2">
-                <a:lumMod val="75000"/>
-              </a:schemeClr>
-            </a:solidFill>
-            <a:prstDash val="lgDash"/>
-          </a:ln>
-        </p:spPr>
-        <p:style>
-          <a:lnRef idx="2">
-            <a:schemeClr val="accent1">
-              <a:shade val="15000"/>
-            </a:schemeClr>
-          </a:lnRef>
-          <a:fillRef idx="1">
-            <a:schemeClr val="accent1"/>
-          </a:fillRef>
-          <a:effectRef idx="0">
-            <a:schemeClr val="accent1"/>
-          </a:effectRef>
-          <a:fontRef idx="minor">
-            <a:schemeClr val="lt1"/>
-          </a:fontRef>
-        </p:style>
-        <p:txBody>
-          <a:bodyPr rtlCol="0" anchor="ctr"/>
-          <a:lstStyle/>
-          <a:p>
-            <a:pPr algn="ctr"/>
-            <a:endParaRPr lang="en-US" dirty="0"/>
-          </a:p>
-        </p:txBody>
-      </p:sp>
-      <p:cxnSp>
-        <p:nvCxnSpPr>
-          <p:cNvPr id="10" name="Straight Connector 9">
-            <a:extLst>
-              <a:ext uri="{FF2B5EF4-FFF2-40B4-BE49-F238E27FC236}">
-                <a16:creationId xmlns:a16="http://schemas.microsoft.com/office/drawing/2014/main" id="{03752946-E5F1-8632-6EE6-BB9B1E523C7C}"/>
-              </a:ext>
-            </a:extLst>
-          </p:cNvPr>
-          <p:cNvCxnSpPr>
-            <a:cxnSpLocks/>
-          </p:cNvCxnSpPr>
-          <p:nvPr/>
-        </p:nvCxnSpPr>
-        <p:spPr>
-          <a:xfrm>
-            <a:off x="2015620" y="2388583"/>
-            <a:ext cx="150930" cy="2158279"/>
-          </a:xfrm>
-          <a:prstGeom prst="line">
-            <a:avLst/>
-          </a:prstGeom>
-          <a:ln>
-            <a:solidFill>
-              <a:schemeClr val="bg2">
-                <a:lumMod val="75000"/>
-              </a:schemeClr>
-            </a:solidFill>
-          </a:ln>
-        </p:spPr>
-        <p:style>
-          <a:lnRef idx="2">
-            <a:schemeClr val="accent1"/>
-          </a:lnRef>
-          <a:fillRef idx="0">
-            <a:schemeClr val="accent1"/>
-          </a:fillRef>
-          <a:effectRef idx="1">
-            <a:schemeClr val="accent1"/>
-          </a:effectRef>
-          <a:fontRef idx="minor">
-            <a:schemeClr val="tx1"/>
-          </a:fontRef>
-        </p:style>
-      </p:cxnSp>
-      <p:cxnSp>
-        <p:nvCxnSpPr>
-          <p:cNvPr id="11" name="Straight Connector 10">
-            <a:extLst>
-              <a:ext uri="{FF2B5EF4-FFF2-40B4-BE49-F238E27FC236}">
-                <a16:creationId xmlns:a16="http://schemas.microsoft.com/office/drawing/2014/main" id="{5C59E015-7142-A479-B36D-1BB0BFE2BBC3}"/>
-              </a:ext>
-            </a:extLst>
-          </p:cNvPr>
-          <p:cNvCxnSpPr>
-            <a:cxnSpLocks/>
-          </p:cNvCxnSpPr>
-          <p:nvPr/>
-        </p:nvCxnSpPr>
-        <p:spPr>
-          <a:xfrm flipH="1">
-            <a:off x="5315411" y="2388583"/>
-            <a:ext cx="261605" cy="2158279"/>
-          </a:xfrm>
-          <a:prstGeom prst="line">
-            <a:avLst/>
-          </a:prstGeom>
-          <a:ln>
-            <a:solidFill>
-              <a:schemeClr val="bg2">
-                <a:lumMod val="75000"/>
-              </a:schemeClr>
-            </a:solidFill>
-          </a:ln>
-        </p:spPr>
-        <p:style>
-          <a:lnRef idx="2">
-            <a:schemeClr val="accent1"/>
-          </a:lnRef>
-          <a:fillRef idx="0">
-            <a:schemeClr val="accent1"/>
-          </a:fillRef>
-          <a:effectRef idx="1">
-            <a:schemeClr val="accent1"/>
-          </a:effectRef>
-          <a:fontRef idx="minor">
-            <a:schemeClr val="tx1"/>
-          </a:fontRef>
-        </p:style>
-      </p:cxnSp>
-      <p:pic>
-        <p:nvPicPr>
-          <p:cNvPr id="20" name="Picture 19">
-            <a:extLst>
-              <a:ext uri="{FF2B5EF4-FFF2-40B4-BE49-F238E27FC236}">
-                <a16:creationId xmlns:a16="http://schemas.microsoft.com/office/drawing/2014/main" id="{1B5A77E6-7334-CE6B-E6B8-7BBECB4550D7}"/>
-              </a:ext>
-            </a:extLst>
-          </p:cNvPr>
-          <p:cNvPicPr>
-            <a:picLocks noChangeAspect="1"/>
-          </p:cNvPicPr>
-          <p:nvPr/>
-        </p:nvPicPr>
-        <p:blipFill>
-          <a:blip r:embed="rId4"/>
-          <a:stretch>
-            <a:fillRect/>
-          </a:stretch>
-        </p:blipFill>
-        <p:spPr>
-          <a:xfrm>
-            <a:off x="2166550" y="2819667"/>
-            <a:ext cx="3148861" cy="1779791"/>
-          </a:xfrm>
-          <a:prstGeom prst="rect">
-            <a:avLst/>
-          </a:prstGeom>
-          <a:ln>
-            <a:solidFill>
-              <a:schemeClr val="bg2">
-                <a:lumMod val="75000"/>
-              </a:schemeClr>
-            </a:solidFill>
-          </a:ln>
         </p:spPr>
       </p:pic>
     </p:spTree>
@@ -3872,10 +3511,10 @@
       </p:grpSpPr>
       <p:pic>
         <p:nvPicPr>
-          <p:cNvPr id="8" name="Picture 7">
-            <a:extLst>
-              <a:ext uri="{FF2B5EF4-FFF2-40B4-BE49-F238E27FC236}">
-                <a16:creationId xmlns:a16="http://schemas.microsoft.com/office/drawing/2014/main" id="{637BBCFE-011F-1FFA-A232-E0E0B4B9BE78}"/>
+          <p:cNvPr id="5" name="Picture 4">
+            <a:extLst>
+              <a:ext uri="{FF2B5EF4-FFF2-40B4-BE49-F238E27FC236}">
+                <a16:creationId xmlns:a16="http://schemas.microsoft.com/office/drawing/2014/main" id="{5C81022F-B8FA-FC2E-2681-87AF6A39CB6A}"/>
               </a:ext>
             </a:extLst>
           </p:cNvPr>
@@ -3892,8 +3531,8 @@
         </p:blipFill>
         <p:spPr>
           <a:xfrm>
-            <a:off x="4000207" y="2152862"/>
-            <a:ext cx="4191585" cy="2486372"/>
+            <a:off x="0" y="0"/>
+            <a:ext cx="4134427" cy="2476846"/>
           </a:xfrm>
           <a:prstGeom prst="rect">
             <a:avLst/>
@@ -3902,10 +3541,10 @@
       </p:pic>
       <p:pic>
         <p:nvPicPr>
-          <p:cNvPr id="6" name="Picture 5">
-            <a:extLst>
-              <a:ext uri="{FF2B5EF4-FFF2-40B4-BE49-F238E27FC236}">
-                <a16:creationId xmlns:a16="http://schemas.microsoft.com/office/drawing/2014/main" id="{27F2AA3B-1222-D484-2F16-4276D4E097BC}"/>
+          <p:cNvPr id="3" name="Picture 2">
+            <a:extLst>
+              <a:ext uri="{FF2B5EF4-FFF2-40B4-BE49-F238E27FC236}">
+                <a16:creationId xmlns:a16="http://schemas.microsoft.com/office/drawing/2014/main" id="{033F2024-BDDA-B50B-C0F5-DB428C3473FF}"/>
               </a:ext>
             </a:extLst>
           </p:cNvPr>
@@ -3916,15 +3555,14 @@
         </p:nvPicPr>
         <p:blipFill>
           <a:blip r:embed="rId3"/>
-          <a:srcRect l="83369" b="57878"/>
           <a:stretch>
             <a:fillRect/>
           </a:stretch>
         </p:blipFill>
         <p:spPr>
           <a:xfrm>
-            <a:off x="7229366" y="2216215"/>
-            <a:ext cx="880013" cy="996447"/>
+            <a:off x="3047367" y="79512"/>
+            <a:ext cx="1028844" cy="1095528"/>
           </a:xfrm>
           <a:prstGeom prst="rect">
             <a:avLst/>
@@ -3963,10 +3601,10 @@
       </p:grpSpPr>
       <p:pic>
         <p:nvPicPr>
-          <p:cNvPr id="8" name="Picture 7">
-            <a:extLst>
-              <a:ext uri="{FF2B5EF4-FFF2-40B4-BE49-F238E27FC236}">
-                <a16:creationId xmlns:a16="http://schemas.microsoft.com/office/drawing/2014/main" id="{E699B4FE-3B63-5F24-D103-88CC125D0AB6}"/>
+          <p:cNvPr id="5" name="Picture 4">
+            <a:extLst>
+              <a:ext uri="{FF2B5EF4-FFF2-40B4-BE49-F238E27FC236}">
+                <a16:creationId xmlns:a16="http://schemas.microsoft.com/office/drawing/2014/main" id="{A1BBA62E-A587-872F-18E7-DCE1CFEC19F1}"/>
               </a:ext>
             </a:extLst>
           </p:cNvPr>
@@ -3983,8 +3621,8 @@
         </p:blipFill>
         <p:spPr>
           <a:xfrm>
-            <a:off x="4076418" y="2190577"/>
-            <a:ext cx="4039164" cy="2476846"/>
+            <a:off x="0" y="0"/>
+            <a:ext cx="4134427" cy="2457793"/>
           </a:xfrm>
           <a:prstGeom prst="rect">
             <a:avLst/>
@@ -3993,10 +3631,10 @@
       </p:pic>
       <p:pic>
         <p:nvPicPr>
-          <p:cNvPr id="6" name="Picture 5">
-            <a:extLst>
-              <a:ext uri="{FF2B5EF4-FFF2-40B4-BE49-F238E27FC236}">
-                <a16:creationId xmlns:a16="http://schemas.microsoft.com/office/drawing/2014/main" id="{784EA8C4-64F9-9B14-B8BA-353989409D79}"/>
+          <p:cNvPr id="3" name="Picture 2">
+            <a:extLst>
+              <a:ext uri="{FF2B5EF4-FFF2-40B4-BE49-F238E27FC236}">
+                <a16:creationId xmlns:a16="http://schemas.microsoft.com/office/drawing/2014/main" id="{F4285438-8794-8ED6-4C87-E2C847CD47D4}"/>
               </a:ext>
             </a:extLst>
           </p:cNvPr>
@@ -4007,15 +3645,14 @@
         </p:nvPicPr>
         <p:blipFill>
           <a:blip r:embed="rId3"/>
-          <a:srcRect l="83369" b="57878"/>
           <a:stretch>
             <a:fillRect/>
           </a:stretch>
         </p:blipFill>
         <p:spPr>
           <a:xfrm>
-            <a:off x="7258920" y="2249167"/>
-            <a:ext cx="792794" cy="897688"/>
+            <a:off x="4134427" y="0"/>
+            <a:ext cx="1028844" cy="1095528"/>
           </a:xfrm>
           <a:prstGeom prst="rect">
             <a:avLst/>

--- a/data/data_analysis/CAGR_plots.pptx
+++ b/data/data_analysis/CAGR_plots.pptx
@@ -9,6 +9,9 @@
     <p:sldId id="257" r:id="rId3"/>
     <p:sldId id="258" r:id="rId4"/>
     <p:sldId id="259" r:id="rId5"/>
+    <p:sldId id="260" r:id="rId6"/>
+    <p:sldId id="261" r:id="rId7"/>
+    <p:sldId id="262" r:id="rId8"/>
   </p:sldIdLst>
   <p:sldSz cx="12192000" cy="6858000"/>
   <p:notesSz cx="6858000" cy="9144000"/>
@@ -262,7 +265,7 @@
           <a:p>
             <a:fld id="{25C820A4-0B52-43A8-957A-6471D3E9C03A}" type="datetimeFigureOut">
               <a:rPr lang="en-US" smtClean="0"/>
-              <a:t>7/10/2026</a:t>
+              <a:t>7/14/2026</a:t>
             </a:fld>
             <a:endParaRPr lang="en-US"/>
           </a:p>
@@ -460,7 +463,7 @@
           <a:p>
             <a:fld id="{25C820A4-0B52-43A8-957A-6471D3E9C03A}" type="datetimeFigureOut">
               <a:rPr lang="en-US" smtClean="0"/>
-              <a:t>7/10/2026</a:t>
+              <a:t>7/14/2026</a:t>
             </a:fld>
             <a:endParaRPr lang="en-US"/>
           </a:p>
@@ -668,7 +671,7 @@
           <a:p>
             <a:fld id="{25C820A4-0B52-43A8-957A-6471D3E9C03A}" type="datetimeFigureOut">
               <a:rPr lang="en-US" smtClean="0"/>
-              <a:t>7/10/2026</a:t>
+              <a:t>7/14/2026</a:t>
             </a:fld>
             <a:endParaRPr lang="en-US"/>
           </a:p>
@@ -866,7 +869,7 @@
           <a:p>
             <a:fld id="{25C820A4-0B52-43A8-957A-6471D3E9C03A}" type="datetimeFigureOut">
               <a:rPr lang="en-US" smtClean="0"/>
-              <a:t>7/10/2026</a:t>
+              <a:t>7/14/2026</a:t>
             </a:fld>
             <a:endParaRPr lang="en-US"/>
           </a:p>
@@ -1141,7 +1144,7 @@
           <a:p>
             <a:fld id="{25C820A4-0B52-43A8-957A-6471D3E9C03A}" type="datetimeFigureOut">
               <a:rPr lang="en-US" smtClean="0"/>
-              <a:t>7/10/2026</a:t>
+              <a:t>7/14/2026</a:t>
             </a:fld>
             <a:endParaRPr lang="en-US"/>
           </a:p>
@@ -1406,7 +1409,7 @@
           <a:p>
             <a:fld id="{25C820A4-0B52-43A8-957A-6471D3E9C03A}" type="datetimeFigureOut">
               <a:rPr lang="en-US" smtClean="0"/>
-              <a:t>7/10/2026</a:t>
+              <a:t>7/14/2026</a:t>
             </a:fld>
             <a:endParaRPr lang="en-US"/>
           </a:p>
@@ -1818,7 +1821,7 @@
           <a:p>
             <a:fld id="{25C820A4-0B52-43A8-957A-6471D3E9C03A}" type="datetimeFigureOut">
               <a:rPr lang="en-US" smtClean="0"/>
-              <a:t>7/10/2026</a:t>
+              <a:t>7/14/2026</a:t>
             </a:fld>
             <a:endParaRPr lang="en-US"/>
           </a:p>
@@ -1959,7 +1962,7 @@
           <a:p>
             <a:fld id="{25C820A4-0B52-43A8-957A-6471D3E9C03A}" type="datetimeFigureOut">
               <a:rPr lang="en-US" smtClean="0"/>
-              <a:t>7/10/2026</a:t>
+              <a:t>7/14/2026</a:t>
             </a:fld>
             <a:endParaRPr lang="en-US"/>
           </a:p>
@@ -2072,7 +2075,7 @@
           <a:p>
             <a:fld id="{25C820A4-0B52-43A8-957A-6471D3E9C03A}" type="datetimeFigureOut">
               <a:rPr lang="en-US" smtClean="0"/>
-              <a:t>7/10/2026</a:t>
+              <a:t>7/14/2026</a:t>
             </a:fld>
             <a:endParaRPr lang="en-US"/>
           </a:p>
@@ -2383,7 +2386,7 @@
           <a:p>
             <a:fld id="{25C820A4-0B52-43A8-957A-6471D3E9C03A}" type="datetimeFigureOut">
               <a:rPr lang="en-US" smtClean="0"/>
-              <a:t>7/10/2026</a:t>
+              <a:t>7/14/2026</a:t>
             </a:fld>
             <a:endParaRPr lang="en-US"/>
           </a:p>
@@ -2671,7 +2674,7 @@
           <a:p>
             <a:fld id="{25C820A4-0B52-43A8-957A-6471D3E9C03A}" type="datetimeFigureOut">
               <a:rPr lang="en-US" smtClean="0"/>
-              <a:t>7/10/2026</a:t>
+              <a:t>7/14/2026</a:t>
             </a:fld>
             <a:endParaRPr lang="en-US"/>
           </a:p>
@@ -2912,7 +2915,7 @@
           <a:p>
             <a:fld id="{25C820A4-0B52-43A8-957A-6471D3E9C03A}" type="datetimeFigureOut">
               <a:rPr lang="en-US" smtClean="0"/>
-              <a:t>7/10/2026</a:t>
+              <a:t>7/14/2026</a:t>
             </a:fld>
             <a:endParaRPr lang="en-US"/>
           </a:p>
@@ -3672,6 +3675,294 @@
 </p:sld>
 </file>
 
+<file path=ppt/slides/slide5.xml><?xml version="1.0" encoding="utf-8"?>
+<p:sld xmlns:a="http://schemas.openxmlformats.org/drawingml/2006/main" xmlns:r="http://schemas.openxmlformats.org/officeDocument/2006/relationships" xmlns:p="http://schemas.openxmlformats.org/presentationml/2006/main">
+  <p:cSld>
+    <p:spTree>
+      <p:nvGrpSpPr>
+        <p:cNvPr id="1" name="">
+          <a:extLst>
+            <a:ext uri="{FF2B5EF4-FFF2-40B4-BE49-F238E27FC236}">
+              <a16:creationId xmlns:a16="http://schemas.microsoft.com/office/drawing/2014/main" id="{C77F5F33-99CA-0504-6C3C-DB72A8328C11}"/>
+            </a:ext>
+          </a:extLst>
+        </p:cNvPr>
+        <p:cNvGrpSpPr/>
+        <p:nvPr/>
+      </p:nvGrpSpPr>
+      <p:grpSpPr>
+        <a:xfrm>
+          <a:off x="0" y="0"/>
+          <a:ext cx="0" cy="0"/>
+          <a:chOff x="0" y="0"/>
+          <a:chExt cx="0" cy="0"/>
+        </a:xfrm>
+      </p:grpSpPr>
+      <p:pic>
+        <p:nvPicPr>
+          <p:cNvPr id="4" name="Picture 3">
+            <a:extLst>
+              <a:ext uri="{FF2B5EF4-FFF2-40B4-BE49-F238E27FC236}">
+                <a16:creationId xmlns:a16="http://schemas.microsoft.com/office/drawing/2014/main" id="{CC86A5D1-DE65-90C0-D7DC-5479E1645CF8}"/>
+              </a:ext>
+            </a:extLst>
+          </p:cNvPr>
+          <p:cNvPicPr>
+            <a:picLocks noChangeAspect="1"/>
+          </p:cNvPicPr>
+          <p:nvPr/>
+        </p:nvPicPr>
+        <p:blipFill>
+          <a:blip r:embed="rId2"/>
+          <a:stretch>
+            <a:fillRect/>
+          </a:stretch>
+        </p:blipFill>
+        <p:spPr>
+          <a:xfrm>
+            <a:off x="0" y="0"/>
+            <a:ext cx="4134427" cy="2448267"/>
+          </a:xfrm>
+          <a:prstGeom prst="rect">
+            <a:avLst/>
+          </a:prstGeom>
+        </p:spPr>
+      </p:pic>
+      <p:pic>
+        <p:nvPicPr>
+          <p:cNvPr id="3" name="Picture 2">
+            <a:extLst>
+              <a:ext uri="{FF2B5EF4-FFF2-40B4-BE49-F238E27FC236}">
+                <a16:creationId xmlns:a16="http://schemas.microsoft.com/office/drawing/2014/main" id="{ED932843-C86B-DF5E-AE79-028E821BC5F0}"/>
+              </a:ext>
+            </a:extLst>
+          </p:cNvPr>
+          <p:cNvPicPr>
+            <a:picLocks noChangeAspect="1"/>
+          </p:cNvPicPr>
+          <p:nvPr/>
+        </p:nvPicPr>
+        <p:blipFill>
+          <a:blip r:embed="rId3"/>
+          <a:stretch>
+            <a:fillRect/>
+          </a:stretch>
+        </p:blipFill>
+        <p:spPr>
+          <a:xfrm>
+            <a:off x="717458" y="83079"/>
+            <a:ext cx="1028844" cy="1095528"/>
+          </a:xfrm>
+          <a:prstGeom prst="rect">
+            <a:avLst/>
+          </a:prstGeom>
+        </p:spPr>
+      </p:pic>
+    </p:spTree>
+    <p:extLst>
+      <p:ext uri="{BB962C8B-B14F-4D97-AF65-F5344CB8AC3E}">
+        <p14:creationId xmlns:p14="http://schemas.microsoft.com/office/powerpoint/2010/main" val="540003396"/>
+      </p:ext>
+    </p:extLst>
+  </p:cSld>
+  <p:clrMapOvr>
+    <a:masterClrMapping/>
+  </p:clrMapOvr>
+</p:sld>
+</file>
+
+<file path=ppt/slides/slide6.xml><?xml version="1.0" encoding="utf-8"?>
+<p:sld xmlns:a="http://schemas.openxmlformats.org/drawingml/2006/main" xmlns:r="http://schemas.openxmlformats.org/officeDocument/2006/relationships" xmlns:p="http://schemas.openxmlformats.org/presentationml/2006/main">
+  <p:cSld>
+    <p:spTree>
+      <p:nvGrpSpPr>
+        <p:cNvPr id="1" name="">
+          <a:extLst>
+            <a:ext uri="{FF2B5EF4-FFF2-40B4-BE49-F238E27FC236}">
+              <a16:creationId xmlns:a16="http://schemas.microsoft.com/office/drawing/2014/main" id="{8C6FEF73-1922-7278-C955-6DB4EFF50B4A}"/>
+            </a:ext>
+          </a:extLst>
+        </p:cNvPr>
+        <p:cNvGrpSpPr/>
+        <p:nvPr/>
+      </p:nvGrpSpPr>
+      <p:grpSpPr>
+        <a:xfrm>
+          <a:off x="0" y="0"/>
+          <a:ext cx="0" cy="0"/>
+          <a:chOff x="0" y="0"/>
+          <a:chExt cx="0" cy="0"/>
+        </a:xfrm>
+      </p:grpSpPr>
+      <p:pic>
+        <p:nvPicPr>
+          <p:cNvPr id="5" name="Picture 4">
+            <a:extLst>
+              <a:ext uri="{FF2B5EF4-FFF2-40B4-BE49-F238E27FC236}">
+                <a16:creationId xmlns:a16="http://schemas.microsoft.com/office/drawing/2014/main" id="{BDABBD13-13B0-D4D0-4813-20243B88A533}"/>
+              </a:ext>
+            </a:extLst>
+          </p:cNvPr>
+          <p:cNvPicPr>
+            <a:picLocks noChangeAspect="1"/>
+          </p:cNvPicPr>
+          <p:nvPr/>
+        </p:nvPicPr>
+        <p:blipFill>
+          <a:blip r:embed="rId2"/>
+          <a:stretch>
+            <a:fillRect/>
+          </a:stretch>
+        </p:blipFill>
+        <p:spPr>
+          <a:xfrm>
+            <a:off x="0" y="0"/>
+            <a:ext cx="4191585" cy="2467319"/>
+          </a:xfrm>
+          <a:prstGeom prst="rect">
+            <a:avLst/>
+          </a:prstGeom>
+        </p:spPr>
+      </p:pic>
+      <p:pic>
+        <p:nvPicPr>
+          <p:cNvPr id="3" name="Picture 2">
+            <a:extLst>
+              <a:ext uri="{FF2B5EF4-FFF2-40B4-BE49-F238E27FC236}">
+                <a16:creationId xmlns:a16="http://schemas.microsoft.com/office/drawing/2014/main" id="{86701E4D-E057-AE0E-C9B3-14DAC58DF00B}"/>
+              </a:ext>
+            </a:extLst>
+          </p:cNvPr>
+          <p:cNvPicPr>
+            <a:picLocks noChangeAspect="1"/>
+          </p:cNvPicPr>
+          <p:nvPr/>
+        </p:nvPicPr>
+        <p:blipFill>
+          <a:blip r:embed="rId3"/>
+          <a:stretch>
+            <a:fillRect/>
+          </a:stretch>
+        </p:blipFill>
+        <p:spPr>
+          <a:xfrm>
+            <a:off x="1752174" y="1094481"/>
+            <a:ext cx="1028844" cy="1095528"/>
+          </a:xfrm>
+          <a:prstGeom prst="rect">
+            <a:avLst/>
+          </a:prstGeom>
+        </p:spPr>
+      </p:pic>
+    </p:spTree>
+    <p:extLst>
+      <p:ext uri="{BB962C8B-B14F-4D97-AF65-F5344CB8AC3E}">
+        <p14:creationId xmlns:p14="http://schemas.microsoft.com/office/powerpoint/2010/main" val="4215283851"/>
+      </p:ext>
+    </p:extLst>
+  </p:cSld>
+  <p:clrMapOvr>
+    <a:masterClrMapping/>
+  </p:clrMapOvr>
+</p:sld>
+</file>
+
+<file path=ppt/slides/slide7.xml><?xml version="1.0" encoding="utf-8"?>
+<p:sld xmlns:a="http://schemas.openxmlformats.org/drawingml/2006/main" xmlns:r="http://schemas.openxmlformats.org/officeDocument/2006/relationships" xmlns:p="http://schemas.openxmlformats.org/presentationml/2006/main">
+  <p:cSld>
+    <p:spTree>
+      <p:nvGrpSpPr>
+        <p:cNvPr id="1" name="">
+          <a:extLst>
+            <a:ext uri="{FF2B5EF4-FFF2-40B4-BE49-F238E27FC236}">
+              <a16:creationId xmlns:a16="http://schemas.microsoft.com/office/drawing/2014/main" id="{6257E926-2845-1250-79EC-AC96511F0326}"/>
+            </a:ext>
+          </a:extLst>
+        </p:cNvPr>
+        <p:cNvGrpSpPr/>
+        <p:nvPr/>
+      </p:nvGrpSpPr>
+      <p:grpSpPr>
+        <a:xfrm>
+          <a:off x="0" y="0"/>
+          <a:ext cx="0" cy="0"/>
+          <a:chOff x="0" y="0"/>
+          <a:chExt cx="0" cy="0"/>
+        </a:xfrm>
+      </p:grpSpPr>
+      <p:pic>
+        <p:nvPicPr>
+          <p:cNvPr id="4" name="Picture 3">
+            <a:extLst>
+              <a:ext uri="{FF2B5EF4-FFF2-40B4-BE49-F238E27FC236}">
+                <a16:creationId xmlns:a16="http://schemas.microsoft.com/office/drawing/2014/main" id="{3A206368-5DAB-3AC9-23AD-1D923C8F650B}"/>
+              </a:ext>
+            </a:extLst>
+          </p:cNvPr>
+          <p:cNvPicPr>
+            <a:picLocks noChangeAspect="1"/>
+          </p:cNvPicPr>
+          <p:nvPr/>
+        </p:nvPicPr>
+        <p:blipFill>
+          <a:blip r:embed="rId2"/>
+          <a:stretch>
+            <a:fillRect/>
+          </a:stretch>
+        </p:blipFill>
+        <p:spPr>
+          <a:xfrm>
+            <a:off x="0" y="0"/>
+            <a:ext cx="4172532" cy="2486372"/>
+          </a:xfrm>
+          <a:prstGeom prst="rect">
+            <a:avLst/>
+          </a:prstGeom>
+        </p:spPr>
+      </p:pic>
+      <p:pic>
+        <p:nvPicPr>
+          <p:cNvPr id="7" name="Picture 6">
+            <a:extLst>
+              <a:ext uri="{FF2B5EF4-FFF2-40B4-BE49-F238E27FC236}">
+                <a16:creationId xmlns:a16="http://schemas.microsoft.com/office/drawing/2014/main" id="{124361B1-5CC0-15F4-89DB-765D1EB739CB}"/>
+              </a:ext>
+            </a:extLst>
+          </p:cNvPr>
+          <p:cNvPicPr>
+            <a:picLocks noChangeAspect="1"/>
+          </p:cNvPicPr>
+          <p:nvPr/>
+        </p:nvPicPr>
+        <p:blipFill>
+          <a:blip r:embed="rId3"/>
+          <a:stretch>
+            <a:fillRect/>
+          </a:stretch>
+        </p:blipFill>
+        <p:spPr>
+          <a:xfrm>
+            <a:off x="653394" y="104542"/>
+            <a:ext cx="1019317" cy="1114581"/>
+          </a:xfrm>
+          <a:prstGeom prst="rect">
+            <a:avLst/>
+          </a:prstGeom>
+        </p:spPr>
+      </p:pic>
+    </p:spTree>
+    <p:extLst>
+      <p:ext uri="{BB962C8B-B14F-4D97-AF65-F5344CB8AC3E}">
+        <p14:creationId xmlns:p14="http://schemas.microsoft.com/office/powerpoint/2010/main" val="457780916"/>
+      </p:ext>
+    </p:extLst>
+  </p:cSld>
+  <p:clrMapOvr>
+    <a:masterClrMapping/>
+  </p:clrMapOvr>
+</p:sld>
+</file>
+
 <file path=ppt/theme/theme1.xml><?xml version="1.0" encoding="utf-8"?>
 <a:theme xmlns:a="http://schemas.openxmlformats.org/drawingml/2006/main" name="Office Theme">
   <a:themeElements>

--- a/data/data_analysis/CAGR_plots.pptx
+++ b/data/data_analysis/CAGR_plots.pptx
@@ -12,6 +12,11 @@
     <p:sldId id="260" r:id="rId6"/>
     <p:sldId id="261" r:id="rId7"/>
     <p:sldId id="262" r:id="rId8"/>
+    <p:sldId id="263" r:id="rId9"/>
+    <p:sldId id="264" r:id="rId10"/>
+    <p:sldId id="266" r:id="rId11"/>
+    <p:sldId id="267" r:id="rId12"/>
+    <p:sldId id="265" r:id="rId13"/>
   </p:sldIdLst>
   <p:sldSz cx="12192000" cy="6858000"/>
   <p:notesSz cx="6858000" cy="9144000"/>
@@ -265,7 +270,7 @@
           <a:p>
             <a:fld id="{25C820A4-0B52-43A8-957A-6471D3E9C03A}" type="datetimeFigureOut">
               <a:rPr lang="en-US" smtClean="0"/>
-              <a:t>7/14/2026</a:t>
+              <a:t>7/15/2026</a:t>
             </a:fld>
             <a:endParaRPr lang="en-US"/>
           </a:p>
@@ -463,7 +468,7 @@
           <a:p>
             <a:fld id="{25C820A4-0B52-43A8-957A-6471D3E9C03A}" type="datetimeFigureOut">
               <a:rPr lang="en-US" smtClean="0"/>
-              <a:t>7/14/2026</a:t>
+              <a:t>7/15/2026</a:t>
             </a:fld>
             <a:endParaRPr lang="en-US"/>
           </a:p>
@@ -671,7 +676,7 @@
           <a:p>
             <a:fld id="{25C820A4-0B52-43A8-957A-6471D3E9C03A}" type="datetimeFigureOut">
               <a:rPr lang="en-US" smtClean="0"/>
-              <a:t>7/14/2026</a:t>
+              <a:t>7/15/2026</a:t>
             </a:fld>
             <a:endParaRPr lang="en-US"/>
           </a:p>
@@ -869,7 +874,7 @@
           <a:p>
             <a:fld id="{25C820A4-0B52-43A8-957A-6471D3E9C03A}" type="datetimeFigureOut">
               <a:rPr lang="en-US" smtClean="0"/>
-              <a:t>7/14/2026</a:t>
+              <a:t>7/15/2026</a:t>
             </a:fld>
             <a:endParaRPr lang="en-US"/>
           </a:p>
@@ -1144,7 +1149,7 @@
           <a:p>
             <a:fld id="{25C820A4-0B52-43A8-957A-6471D3E9C03A}" type="datetimeFigureOut">
               <a:rPr lang="en-US" smtClean="0"/>
-              <a:t>7/14/2026</a:t>
+              <a:t>7/15/2026</a:t>
             </a:fld>
             <a:endParaRPr lang="en-US"/>
           </a:p>
@@ -1409,7 +1414,7 @@
           <a:p>
             <a:fld id="{25C820A4-0B52-43A8-957A-6471D3E9C03A}" type="datetimeFigureOut">
               <a:rPr lang="en-US" smtClean="0"/>
-              <a:t>7/14/2026</a:t>
+              <a:t>7/15/2026</a:t>
             </a:fld>
             <a:endParaRPr lang="en-US"/>
           </a:p>
@@ -1821,7 +1826,7 @@
           <a:p>
             <a:fld id="{25C820A4-0B52-43A8-957A-6471D3E9C03A}" type="datetimeFigureOut">
               <a:rPr lang="en-US" smtClean="0"/>
-              <a:t>7/14/2026</a:t>
+              <a:t>7/15/2026</a:t>
             </a:fld>
             <a:endParaRPr lang="en-US"/>
           </a:p>
@@ -1962,7 +1967,7 @@
           <a:p>
             <a:fld id="{25C820A4-0B52-43A8-957A-6471D3E9C03A}" type="datetimeFigureOut">
               <a:rPr lang="en-US" smtClean="0"/>
-              <a:t>7/14/2026</a:t>
+              <a:t>7/15/2026</a:t>
             </a:fld>
             <a:endParaRPr lang="en-US"/>
           </a:p>
@@ -2075,7 +2080,7 @@
           <a:p>
             <a:fld id="{25C820A4-0B52-43A8-957A-6471D3E9C03A}" type="datetimeFigureOut">
               <a:rPr lang="en-US" smtClean="0"/>
-              <a:t>7/14/2026</a:t>
+              <a:t>7/15/2026</a:t>
             </a:fld>
             <a:endParaRPr lang="en-US"/>
           </a:p>
@@ -2386,7 +2391,7 @@
           <a:p>
             <a:fld id="{25C820A4-0B52-43A8-957A-6471D3E9C03A}" type="datetimeFigureOut">
               <a:rPr lang="en-US" smtClean="0"/>
-              <a:t>7/14/2026</a:t>
+              <a:t>7/15/2026</a:t>
             </a:fld>
             <a:endParaRPr lang="en-US"/>
           </a:p>
@@ -2674,7 +2679,7 @@
           <a:p>
             <a:fld id="{25C820A4-0B52-43A8-957A-6471D3E9C03A}" type="datetimeFigureOut">
               <a:rPr lang="en-US" smtClean="0"/>
-              <a:t>7/14/2026</a:t>
+              <a:t>7/15/2026</a:t>
             </a:fld>
             <a:endParaRPr lang="en-US"/>
           </a:p>
@@ -2915,7 +2920,7 @@
           <a:p>
             <a:fld id="{25C820A4-0B52-43A8-957A-6471D3E9C03A}" type="datetimeFigureOut">
               <a:rPr lang="en-US" smtClean="0"/>
-              <a:t>7/14/2026</a:t>
+              <a:t>7/15/2026</a:t>
             </a:fld>
             <a:endParaRPr lang="en-US"/>
           </a:p>
@@ -3405,6 +3410,688 @@
 </p:sld>
 </file>
 
+<file path=ppt/slides/slide10.xml><?xml version="1.0" encoding="utf-8"?>
+<p:sld xmlns:a="http://schemas.openxmlformats.org/drawingml/2006/main" xmlns:r="http://schemas.openxmlformats.org/officeDocument/2006/relationships" xmlns:p="http://schemas.openxmlformats.org/presentationml/2006/main">
+  <p:cSld>
+    <p:spTree>
+      <p:nvGrpSpPr>
+        <p:cNvPr id="1" name=""/>
+        <p:cNvGrpSpPr/>
+        <p:nvPr/>
+      </p:nvGrpSpPr>
+      <p:grpSpPr>
+        <a:xfrm>
+          <a:off x="0" y="0"/>
+          <a:ext cx="0" cy="0"/>
+          <a:chOff x="0" y="0"/>
+          <a:chExt cx="0" cy="0"/>
+        </a:xfrm>
+      </p:grpSpPr>
+      <p:pic>
+        <p:nvPicPr>
+          <p:cNvPr id="5" name="Picture 4">
+            <a:extLst>
+              <a:ext uri="{FF2B5EF4-FFF2-40B4-BE49-F238E27FC236}">
+                <a16:creationId xmlns:a16="http://schemas.microsoft.com/office/drawing/2014/main" id="{88DBAAC9-88DC-5BE4-1A32-7FDF0CF05681}"/>
+              </a:ext>
+            </a:extLst>
+          </p:cNvPr>
+          <p:cNvPicPr>
+            <a:picLocks noChangeAspect="1"/>
+          </p:cNvPicPr>
+          <p:nvPr/>
+        </p:nvPicPr>
+        <p:blipFill>
+          <a:blip r:embed="rId2"/>
+          <a:stretch>
+            <a:fillRect/>
+          </a:stretch>
+        </p:blipFill>
+        <p:spPr>
+          <a:xfrm>
+            <a:off x="0" y="0"/>
+            <a:ext cx="3386411" cy="3599935"/>
+          </a:xfrm>
+          <a:prstGeom prst="rect">
+            <a:avLst/>
+          </a:prstGeom>
+        </p:spPr>
+      </p:pic>
+      <p:pic>
+        <p:nvPicPr>
+          <p:cNvPr id="7" name="Picture 6">
+            <a:extLst>
+              <a:ext uri="{FF2B5EF4-FFF2-40B4-BE49-F238E27FC236}">
+                <a16:creationId xmlns:a16="http://schemas.microsoft.com/office/drawing/2014/main" id="{E746FE4D-59D0-8973-BC36-4BD2731133E7}"/>
+              </a:ext>
+            </a:extLst>
+          </p:cNvPr>
+          <p:cNvPicPr>
+            <a:picLocks noChangeAspect="1"/>
+          </p:cNvPicPr>
+          <p:nvPr/>
+        </p:nvPicPr>
+        <p:blipFill>
+          <a:blip r:embed="rId3"/>
+          <a:stretch>
+            <a:fillRect/>
+          </a:stretch>
+        </p:blipFill>
+        <p:spPr>
+          <a:xfrm>
+            <a:off x="3386411" y="0"/>
+            <a:ext cx="3619957" cy="3599935"/>
+          </a:xfrm>
+          <a:prstGeom prst="rect">
+            <a:avLst/>
+          </a:prstGeom>
+        </p:spPr>
+      </p:pic>
+      <p:pic>
+        <p:nvPicPr>
+          <p:cNvPr id="9" name="Picture 8">
+            <a:extLst>
+              <a:ext uri="{FF2B5EF4-FFF2-40B4-BE49-F238E27FC236}">
+                <a16:creationId xmlns:a16="http://schemas.microsoft.com/office/drawing/2014/main" id="{D771A87A-B059-77D9-42CE-0A7F30D0B8B8}"/>
+              </a:ext>
+            </a:extLst>
+          </p:cNvPr>
+          <p:cNvPicPr>
+            <a:picLocks noChangeAspect="1"/>
+          </p:cNvPicPr>
+          <p:nvPr/>
+        </p:nvPicPr>
+        <p:blipFill>
+          <a:blip r:embed="rId4"/>
+          <a:stretch>
+            <a:fillRect/>
+          </a:stretch>
+        </p:blipFill>
+        <p:spPr>
+          <a:xfrm>
+            <a:off x="7006368" y="0"/>
+            <a:ext cx="3386411" cy="3599935"/>
+          </a:xfrm>
+          <a:prstGeom prst="rect">
+            <a:avLst/>
+          </a:prstGeom>
+        </p:spPr>
+      </p:pic>
+      <p:sp>
+        <p:nvSpPr>
+          <p:cNvPr id="11" name="TextBox 10">
+            <a:extLst>
+              <a:ext uri="{FF2B5EF4-FFF2-40B4-BE49-F238E27FC236}">
+                <a16:creationId xmlns:a16="http://schemas.microsoft.com/office/drawing/2014/main" id="{C7A8B274-5D78-6C90-0B19-2F9B72C5D68A}"/>
+              </a:ext>
+            </a:extLst>
+          </p:cNvPr>
+          <p:cNvSpPr txBox="1"/>
+          <p:nvPr/>
+        </p:nvSpPr>
+        <p:spPr>
+          <a:xfrm>
+            <a:off x="-64762" y="-16476"/>
+            <a:ext cx="411892" cy="276999"/>
+          </a:xfrm>
+          <a:prstGeom prst="rect">
+            <a:avLst/>
+          </a:prstGeom>
+          <a:noFill/>
+        </p:spPr>
+        <p:txBody>
+          <a:bodyPr wrap="square" rtlCol="0">
+            <a:spAutoFit/>
+          </a:bodyPr>
+          <a:lstStyle/>
+          <a:p>
+            <a:r>
+              <a:rPr lang="en-US" sz="1200" b="1" dirty="0"/>
+              <a:t>a)</a:t>
+            </a:r>
+          </a:p>
+        </p:txBody>
+      </p:sp>
+      <p:sp>
+        <p:nvSpPr>
+          <p:cNvPr id="13" name="TextBox 12">
+            <a:extLst>
+              <a:ext uri="{FF2B5EF4-FFF2-40B4-BE49-F238E27FC236}">
+                <a16:creationId xmlns:a16="http://schemas.microsoft.com/office/drawing/2014/main" id="{E6924875-31D5-1F72-CE11-F7FD72C1C56B}"/>
+              </a:ext>
+            </a:extLst>
+          </p:cNvPr>
+          <p:cNvSpPr txBox="1"/>
+          <p:nvPr/>
+        </p:nvSpPr>
+        <p:spPr>
+          <a:xfrm>
+            <a:off x="3386411" y="-16477"/>
+            <a:ext cx="411892" cy="276999"/>
+          </a:xfrm>
+          <a:prstGeom prst="rect">
+            <a:avLst/>
+          </a:prstGeom>
+          <a:noFill/>
+        </p:spPr>
+        <p:txBody>
+          <a:bodyPr wrap="square" rtlCol="0">
+            <a:spAutoFit/>
+          </a:bodyPr>
+          <a:lstStyle/>
+          <a:p>
+            <a:r>
+              <a:rPr lang="en-US" sz="1200" b="1" dirty="0"/>
+              <a:t>b)</a:t>
+            </a:r>
+          </a:p>
+        </p:txBody>
+      </p:sp>
+      <p:sp>
+        <p:nvSpPr>
+          <p:cNvPr id="15" name="TextBox 14">
+            <a:extLst>
+              <a:ext uri="{FF2B5EF4-FFF2-40B4-BE49-F238E27FC236}">
+                <a16:creationId xmlns:a16="http://schemas.microsoft.com/office/drawing/2014/main" id="{66F31408-98BA-0AC8-D841-CFF80E9DD5C3}"/>
+              </a:ext>
+            </a:extLst>
+          </p:cNvPr>
+          <p:cNvSpPr txBox="1"/>
+          <p:nvPr/>
+        </p:nvSpPr>
+        <p:spPr>
+          <a:xfrm>
+            <a:off x="6941519" y="-16478"/>
+            <a:ext cx="411892" cy="276999"/>
+          </a:xfrm>
+          <a:prstGeom prst="rect">
+            <a:avLst/>
+          </a:prstGeom>
+          <a:noFill/>
+        </p:spPr>
+        <p:txBody>
+          <a:bodyPr wrap="square" rtlCol="0">
+            <a:spAutoFit/>
+          </a:bodyPr>
+          <a:lstStyle/>
+          <a:p>
+            <a:r>
+              <a:rPr lang="en-US" sz="1200" b="1" dirty="0"/>
+              <a:t>c)</a:t>
+            </a:r>
+          </a:p>
+        </p:txBody>
+      </p:sp>
+    </p:spTree>
+    <p:extLst>
+      <p:ext uri="{BB962C8B-B14F-4D97-AF65-F5344CB8AC3E}">
+        <p14:creationId xmlns:p14="http://schemas.microsoft.com/office/powerpoint/2010/main" val="3931581651"/>
+      </p:ext>
+    </p:extLst>
+  </p:cSld>
+  <p:clrMapOvr>
+    <a:masterClrMapping/>
+  </p:clrMapOvr>
+</p:sld>
+</file>
+
+<file path=ppt/slides/slide11.xml><?xml version="1.0" encoding="utf-8"?>
+<p:sld xmlns:a="http://schemas.openxmlformats.org/drawingml/2006/main" xmlns:r="http://schemas.openxmlformats.org/officeDocument/2006/relationships" xmlns:p="http://schemas.openxmlformats.org/presentationml/2006/main">
+  <p:cSld>
+    <p:spTree>
+      <p:nvGrpSpPr>
+        <p:cNvPr id="1" name=""/>
+        <p:cNvGrpSpPr/>
+        <p:nvPr/>
+      </p:nvGrpSpPr>
+      <p:grpSpPr>
+        <a:xfrm>
+          <a:off x="0" y="0"/>
+          <a:ext cx="0" cy="0"/>
+          <a:chOff x="0" y="0"/>
+          <a:chExt cx="0" cy="0"/>
+        </a:xfrm>
+      </p:grpSpPr>
+      <p:pic>
+        <p:nvPicPr>
+          <p:cNvPr id="7" name="Picture 6">
+            <a:extLst>
+              <a:ext uri="{FF2B5EF4-FFF2-40B4-BE49-F238E27FC236}">
+                <a16:creationId xmlns:a16="http://schemas.microsoft.com/office/drawing/2014/main" id="{E89C083E-3F87-E489-2419-ECA541D33C30}"/>
+              </a:ext>
+            </a:extLst>
+          </p:cNvPr>
+          <p:cNvPicPr>
+            <a:picLocks noChangeAspect="1"/>
+          </p:cNvPicPr>
+          <p:nvPr/>
+        </p:nvPicPr>
+        <p:blipFill>
+          <a:blip r:embed="rId2"/>
+          <a:stretch>
+            <a:fillRect/>
+          </a:stretch>
+        </p:blipFill>
+        <p:spPr>
+          <a:xfrm>
+            <a:off x="3805274" y="0"/>
+            <a:ext cx="3187067" cy="4645555"/>
+          </a:xfrm>
+          <a:prstGeom prst="rect">
+            <a:avLst/>
+          </a:prstGeom>
+        </p:spPr>
+      </p:pic>
+      <p:pic>
+        <p:nvPicPr>
+          <p:cNvPr id="9" name="Picture 8">
+            <a:extLst>
+              <a:ext uri="{FF2B5EF4-FFF2-40B4-BE49-F238E27FC236}">
+                <a16:creationId xmlns:a16="http://schemas.microsoft.com/office/drawing/2014/main" id="{565AD08C-9A52-09D8-6099-D02ED84D372F}"/>
+              </a:ext>
+            </a:extLst>
+          </p:cNvPr>
+          <p:cNvPicPr>
+            <a:picLocks noChangeAspect="1"/>
+          </p:cNvPicPr>
+          <p:nvPr/>
+        </p:nvPicPr>
+        <p:blipFill>
+          <a:blip r:embed="rId3"/>
+          <a:stretch>
+            <a:fillRect/>
+          </a:stretch>
+        </p:blipFill>
+        <p:spPr>
+          <a:xfrm>
+            <a:off x="7074719" y="-1"/>
+            <a:ext cx="3286029" cy="4645555"/>
+          </a:xfrm>
+          <a:prstGeom prst="rect">
+            <a:avLst/>
+          </a:prstGeom>
+        </p:spPr>
+      </p:pic>
+      <p:pic>
+        <p:nvPicPr>
+          <p:cNvPr id="11" name="Picture 10">
+            <a:extLst>
+              <a:ext uri="{FF2B5EF4-FFF2-40B4-BE49-F238E27FC236}">
+                <a16:creationId xmlns:a16="http://schemas.microsoft.com/office/drawing/2014/main" id="{1B66D8C0-9354-C70C-D517-EC00585A487A}"/>
+              </a:ext>
+            </a:extLst>
+          </p:cNvPr>
+          <p:cNvPicPr>
+            <a:picLocks noChangeAspect="1"/>
+          </p:cNvPicPr>
+          <p:nvPr/>
+        </p:nvPicPr>
+        <p:blipFill>
+          <a:blip r:embed="rId4"/>
+          <a:stretch>
+            <a:fillRect/>
+          </a:stretch>
+        </p:blipFill>
+        <p:spPr>
+          <a:xfrm>
+            <a:off x="0" y="0"/>
+            <a:ext cx="3805274" cy="4645555"/>
+          </a:xfrm>
+          <a:prstGeom prst="rect">
+            <a:avLst/>
+          </a:prstGeom>
+        </p:spPr>
+      </p:pic>
+      <p:sp>
+        <p:nvSpPr>
+          <p:cNvPr id="13" name="TextBox 12">
+            <a:extLst>
+              <a:ext uri="{FF2B5EF4-FFF2-40B4-BE49-F238E27FC236}">
+                <a16:creationId xmlns:a16="http://schemas.microsoft.com/office/drawing/2014/main" id="{9F07CEB3-BDFC-8599-CA7C-5CA35AD10F86}"/>
+              </a:ext>
+            </a:extLst>
+          </p:cNvPr>
+          <p:cNvSpPr txBox="1"/>
+          <p:nvPr/>
+        </p:nvSpPr>
+        <p:spPr>
+          <a:xfrm>
+            <a:off x="-64762" y="-16476"/>
+            <a:ext cx="411892" cy="276999"/>
+          </a:xfrm>
+          <a:prstGeom prst="rect">
+            <a:avLst/>
+          </a:prstGeom>
+          <a:noFill/>
+        </p:spPr>
+        <p:txBody>
+          <a:bodyPr wrap="square" rtlCol="0">
+            <a:spAutoFit/>
+          </a:bodyPr>
+          <a:lstStyle/>
+          <a:p>
+            <a:r>
+              <a:rPr lang="en-US" sz="1200" b="1" dirty="0"/>
+              <a:t>a)</a:t>
+            </a:r>
+          </a:p>
+        </p:txBody>
+      </p:sp>
+      <p:sp>
+        <p:nvSpPr>
+          <p:cNvPr id="15" name="TextBox 14">
+            <a:extLst>
+              <a:ext uri="{FF2B5EF4-FFF2-40B4-BE49-F238E27FC236}">
+                <a16:creationId xmlns:a16="http://schemas.microsoft.com/office/drawing/2014/main" id="{3EEFE27F-2A25-D63A-167D-A53EAAB61BA0}"/>
+              </a:ext>
+            </a:extLst>
+          </p:cNvPr>
+          <p:cNvSpPr txBox="1"/>
+          <p:nvPr/>
+        </p:nvSpPr>
+        <p:spPr>
+          <a:xfrm>
+            <a:off x="3664090" y="-16478"/>
+            <a:ext cx="411892" cy="276999"/>
+          </a:xfrm>
+          <a:prstGeom prst="rect">
+            <a:avLst/>
+          </a:prstGeom>
+          <a:noFill/>
+        </p:spPr>
+        <p:txBody>
+          <a:bodyPr wrap="square" rtlCol="0">
+            <a:spAutoFit/>
+          </a:bodyPr>
+          <a:lstStyle/>
+          <a:p>
+            <a:r>
+              <a:rPr lang="en-US" sz="1200" b="1" dirty="0"/>
+              <a:t>b)</a:t>
+            </a:r>
+          </a:p>
+        </p:txBody>
+      </p:sp>
+      <p:sp>
+        <p:nvSpPr>
+          <p:cNvPr id="17" name="TextBox 16">
+            <a:extLst>
+              <a:ext uri="{FF2B5EF4-FFF2-40B4-BE49-F238E27FC236}">
+                <a16:creationId xmlns:a16="http://schemas.microsoft.com/office/drawing/2014/main" id="{D6E423EF-9602-B51B-E63A-94467794726D}"/>
+              </a:ext>
+            </a:extLst>
+          </p:cNvPr>
+          <p:cNvSpPr txBox="1"/>
+          <p:nvPr/>
+        </p:nvSpPr>
+        <p:spPr>
+          <a:xfrm>
+            <a:off x="6868773" y="-16479"/>
+            <a:ext cx="411892" cy="276999"/>
+          </a:xfrm>
+          <a:prstGeom prst="rect">
+            <a:avLst/>
+          </a:prstGeom>
+          <a:noFill/>
+        </p:spPr>
+        <p:txBody>
+          <a:bodyPr wrap="square" rtlCol="0">
+            <a:spAutoFit/>
+          </a:bodyPr>
+          <a:lstStyle/>
+          <a:p>
+            <a:r>
+              <a:rPr lang="en-US" sz="1200" b="1" dirty="0"/>
+              <a:t>c)</a:t>
+            </a:r>
+          </a:p>
+        </p:txBody>
+      </p:sp>
+    </p:spTree>
+    <p:extLst>
+      <p:ext uri="{BB962C8B-B14F-4D97-AF65-F5344CB8AC3E}">
+        <p14:creationId xmlns:p14="http://schemas.microsoft.com/office/powerpoint/2010/main" val="4067277962"/>
+      </p:ext>
+    </p:extLst>
+  </p:cSld>
+  <p:clrMapOvr>
+    <a:masterClrMapping/>
+  </p:clrMapOvr>
+</p:sld>
+</file>
+
+<file path=ppt/slides/slide12.xml><?xml version="1.0" encoding="utf-8"?>
+<p:sld xmlns:a="http://schemas.openxmlformats.org/drawingml/2006/main" xmlns:r="http://schemas.openxmlformats.org/officeDocument/2006/relationships" xmlns:p="http://schemas.openxmlformats.org/presentationml/2006/main">
+  <p:cSld>
+    <p:spTree>
+      <p:nvGrpSpPr>
+        <p:cNvPr id="1" name=""/>
+        <p:cNvGrpSpPr/>
+        <p:nvPr/>
+      </p:nvGrpSpPr>
+      <p:grpSpPr>
+        <a:xfrm>
+          <a:off x="0" y="0"/>
+          <a:ext cx="0" cy="0"/>
+          <a:chOff x="0" y="0"/>
+          <a:chExt cx="0" cy="0"/>
+        </a:xfrm>
+      </p:grpSpPr>
+      <p:pic>
+        <p:nvPicPr>
+          <p:cNvPr id="7" name="Picture 6">
+            <a:extLst>
+              <a:ext uri="{FF2B5EF4-FFF2-40B4-BE49-F238E27FC236}">
+                <a16:creationId xmlns:a16="http://schemas.microsoft.com/office/drawing/2014/main" id="{58FC4FF2-99C0-42D0-F10E-2968EFECE213}"/>
+              </a:ext>
+            </a:extLst>
+          </p:cNvPr>
+          <p:cNvPicPr>
+            <a:picLocks noChangeAspect="1"/>
+          </p:cNvPicPr>
+          <p:nvPr/>
+        </p:nvPicPr>
+        <p:blipFill>
+          <a:blip r:embed="rId2"/>
+          <a:stretch>
+            <a:fillRect/>
+          </a:stretch>
+        </p:blipFill>
+        <p:spPr>
+          <a:xfrm>
+            <a:off x="3679195" y="0"/>
+            <a:ext cx="6133108" cy="3145809"/>
+          </a:xfrm>
+          <a:prstGeom prst="rect">
+            <a:avLst/>
+          </a:prstGeom>
+        </p:spPr>
+      </p:pic>
+      <p:pic>
+        <p:nvPicPr>
+          <p:cNvPr id="5" name="Picture 4">
+            <a:extLst>
+              <a:ext uri="{FF2B5EF4-FFF2-40B4-BE49-F238E27FC236}">
+                <a16:creationId xmlns:a16="http://schemas.microsoft.com/office/drawing/2014/main" id="{47EFE37F-DFBB-C4EB-38CC-288414F25691}"/>
+              </a:ext>
+            </a:extLst>
+          </p:cNvPr>
+          <p:cNvPicPr>
+            <a:picLocks noChangeAspect="1"/>
+          </p:cNvPicPr>
+          <p:nvPr/>
+        </p:nvPicPr>
+        <p:blipFill>
+          <a:blip r:embed="rId3">
+            <a:extLst>
+              <a:ext uri="{28A0092B-C50C-407E-A947-70E740481C1C}">
+                <a14:useLocalDpi xmlns:a14="http://schemas.microsoft.com/office/drawing/2010/main" val="0"/>
+              </a:ext>
+            </a:extLst>
+          </a:blip>
+          <a:srcRect t="2463" r="50000" b="65363"/>
+          <a:stretch>
+            <a:fillRect/>
+          </a:stretch>
+        </p:blipFill>
+        <p:spPr>
+          <a:xfrm>
+            <a:off x="74140" y="123044"/>
+            <a:ext cx="3605055" cy="2899719"/>
+          </a:xfrm>
+          <a:prstGeom prst="rect">
+            <a:avLst/>
+          </a:prstGeom>
+        </p:spPr>
+      </p:pic>
+      <p:pic>
+        <p:nvPicPr>
+          <p:cNvPr id="9" name="Picture 8">
+            <a:extLst>
+              <a:ext uri="{FF2B5EF4-FFF2-40B4-BE49-F238E27FC236}">
+                <a16:creationId xmlns:a16="http://schemas.microsoft.com/office/drawing/2014/main" id="{C9C6A861-D6CC-BF40-B197-9A51D34B2935}"/>
+              </a:ext>
+            </a:extLst>
+          </p:cNvPr>
+          <p:cNvPicPr>
+            <a:picLocks noChangeAspect="1"/>
+          </p:cNvPicPr>
+          <p:nvPr/>
+        </p:nvPicPr>
+        <p:blipFill>
+          <a:blip r:embed="rId4"/>
+          <a:stretch>
+            <a:fillRect/>
+          </a:stretch>
+        </p:blipFill>
+        <p:spPr>
+          <a:xfrm>
+            <a:off x="0" y="3022762"/>
+            <a:ext cx="9812303" cy="4374011"/>
+          </a:xfrm>
+          <a:prstGeom prst="rect">
+            <a:avLst/>
+          </a:prstGeom>
+        </p:spPr>
+      </p:pic>
+      <p:sp>
+        <p:nvSpPr>
+          <p:cNvPr id="11" name="TextBox 10">
+            <a:extLst>
+              <a:ext uri="{FF2B5EF4-FFF2-40B4-BE49-F238E27FC236}">
+                <a16:creationId xmlns:a16="http://schemas.microsoft.com/office/drawing/2014/main" id="{B67C2DEF-856A-B527-CD4C-F76D7381EBFE}"/>
+              </a:ext>
+            </a:extLst>
+          </p:cNvPr>
+          <p:cNvSpPr txBox="1"/>
+          <p:nvPr/>
+        </p:nvSpPr>
+        <p:spPr>
+          <a:xfrm>
+            <a:off x="0" y="0"/>
+            <a:ext cx="411892" cy="276999"/>
+          </a:xfrm>
+          <a:prstGeom prst="rect">
+            <a:avLst/>
+          </a:prstGeom>
+          <a:noFill/>
+        </p:spPr>
+        <p:txBody>
+          <a:bodyPr wrap="square" rtlCol="0">
+            <a:spAutoFit/>
+          </a:bodyPr>
+          <a:lstStyle/>
+          <a:p>
+            <a:r>
+              <a:rPr lang="en-US" sz="1200" b="1" dirty="0"/>
+              <a:t>a)</a:t>
+            </a:r>
+          </a:p>
+        </p:txBody>
+      </p:sp>
+      <p:sp>
+        <p:nvSpPr>
+          <p:cNvPr id="13" name="TextBox 12">
+            <a:extLst>
+              <a:ext uri="{FF2B5EF4-FFF2-40B4-BE49-F238E27FC236}">
+                <a16:creationId xmlns:a16="http://schemas.microsoft.com/office/drawing/2014/main" id="{207AF6BF-FECD-4211-46F4-B7991CF830F4}"/>
+              </a:ext>
+            </a:extLst>
+          </p:cNvPr>
+          <p:cNvSpPr txBox="1"/>
+          <p:nvPr/>
+        </p:nvSpPr>
+        <p:spPr>
+          <a:xfrm>
+            <a:off x="3679195" y="0"/>
+            <a:ext cx="411892" cy="276999"/>
+          </a:xfrm>
+          <a:prstGeom prst="rect">
+            <a:avLst/>
+          </a:prstGeom>
+          <a:noFill/>
+        </p:spPr>
+        <p:txBody>
+          <a:bodyPr wrap="square" rtlCol="0">
+            <a:spAutoFit/>
+          </a:bodyPr>
+          <a:lstStyle/>
+          <a:p>
+            <a:r>
+              <a:rPr lang="en-US" sz="1200" b="1" dirty="0"/>
+              <a:t>b)</a:t>
+            </a:r>
+          </a:p>
+        </p:txBody>
+      </p:sp>
+      <p:sp>
+        <p:nvSpPr>
+          <p:cNvPr id="15" name="TextBox 14">
+            <a:extLst>
+              <a:ext uri="{FF2B5EF4-FFF2-40B4-BE49-F238E27FC236}">
+                <a16:creationId xmlns:a16="http://schemas.microsoft.com/office/drawing/2014/main" id="{46904555-3B33-BFBA-0BCA-FE4328BFFBB2}"/>
+              </a:ext>
+            </a:extLst>
+          </p:cNvPr>
+          <p:cNvSpPr txBox="1"/>
+          <p:nvPr/>
+        </p:nvSpPr>
+        <p:spPr>
+          <a:xfrm>
+            <a:off x="0" y="3022762"/>
+            <a:ext cx="411892" cy="276999"/>
+          </a:xfrm>
+          <a:prstGeom prst="rect">
+            <a:avLst/>
+          </a:prstGeom>
+          <a:noFill/>
+        </p:spPr>
+        <p:txBody>
+          <a:bodyPr wrap="square" rtlCol="0">
+            <a:spAutoFit/>
+          </a:bodyPr>
+          <a:lstStyle/>
+          <a:p>
+            <a:r>
+              <a:rPr lang="en-US" sz="1200" b="1" dirty="0"/>
+              <a:t>c)</a:t>
+            </a:r>
+          </a:p>
+        </p:txBody>
+      </p:sp>
+    </p:spTree>
+    <p:extLst>
+      <p:ext uri="{BB962C8B-B14F-4D97-AF65-F5344CB8AC3E}">
+        <p14:creationId xmlns:p14="http://schemas.microsoft.com/office/powerpoint/2010/main" val="2163555376"/>
+      </p:ext>
+    </p:extLst>
+  </p:cSld>
+  <p:clrMapOvr>
+    <a:masterClrMapping/>
+  </p:clrMapOvr>
+</p:sld>
+</file>
+
 <file path=ppt/slides/slide2.xml><?xml version="1.0" encoding="utf-8"?>
 <p:sld xmlns:a="http://schemas.openxmlformats.org/drawingml/2006/main" xmlns:r="http://schemas.openxmlformats.org/officeDocument/2006/relationships" xmlns:p="http://schemas.openxmlformats.org/presentationml/2006/main">
   <p:cSld>
@@ -3954,6 +4641,562 @@
     <p:extLst>
       <p:ext uri="{BB962C8B-B14F-4D97-AF65-F5344CB8AC3E}">
         <p14:creationId xmlns:p14="http://schemas.microsoft.com/office/powerpoint/2010/main" val="457780916"/>
+      </p:ext>
+    </p:extLst>
+  </p:cSld>
+  <p:clrMapOvr>
+    <a:masterClrMapping/>
+  </p:clrMapOvr>
+</p:sld>
+</file>
+
+<file path=ppt/slides/slide8.xml><?xml version="1.0" encoding="utf-8"?>
+<p:sld xmlns:a="http://schemas.openxmlformats.org/drawingml/2006/main" xmlns:r="http://schemas.openxmlformats.org/officeDocument/2006/relationships" xmlns:p="http://schemas.openxmlformats.org/presentationml/2006/main">
+  <p:cSld>
+    <p:spTree>
+      <p:nvGrpSpPr>
+        <p:cNvPr id="1" name=""/>
+        <p:cNvGrpSpPr/>
+        <p:nvPr/>
+      </p:nvGrpSpPr>
+      <p:grpSpPr>
+        <a:xfrm>
+          <a:off x="0" y="0"/>
+          <a:ext cx="0" cy="0"/>
+          <a:chOff x="0" y="0"/>
+          <a:chExt cx="0" cy="0"/>
+        </a:xfrm>
+      </p:grpSpPr>
+      <p:pic>
+        <p:nvPicPr>
+          <p:cNvPr id="7" name="Picture 6">
+            <a:extLst>
+              <a:ext uri="{FF2B5EF4-FFF2-40B4-BE49-F238E27FC236}">
+                <a16:creationId xmlns:a16="http://schemas.microsoft.com/office/drawing/2014/main" id="{8CE3438E-FC38-CB18-6748-6E3EA945584F}"/>
+              </a:ext>
+            </a:extLst>
+          </p:cNvPr>
+          <p:cNvPicPr>
+            <a:picLocks noChangeAspect="1"/>
+          </p:cNvPicPr>
+          <p:nvPr/>
+        </p:nvPicPr>
+        <p:blipFill>
+          <a:blip r:embed="rId2"/>
+          <a:stretch>
+            <a:fillRect/>
+          </a:stretch>
+        </p:blipFill>
+        <p:spPr>
+          <a:xfrm>
+            <a:off x="-6090" y="2510069"/>
+            <a:ext cx="8540929" cy="3892383"/>
+          </a:xfrm>
+          <a:prstGeom prst="rect">
+            <a:avLst/>
+          </a:prstGeom>
+        </p:spPr>
+      </p:pic>
+      <p:pic>
+        <p:nvPicPr>
+          <p:cNvPr id="14" name="Picture 13">
+            <a:extLst>
+              <a:ext uri="{FF2B5EF4-FFF2-40B4-BE49-F238E27FC236}">
+                <a16:creationId xmlns:a16="http://schemas.microsoft.com/office/drawing/2014/main" id="{0F6934BA-EC05-928F-0A44-0816A91E98D4}"/>
+              </a:ext>
+            </a:extLst>
+          </p:cNvPr>
+          <p:cNvPicPr>
+            <a:picLocks noChangeAspect="1"/>
+          </p:cNvPicPr>
+          <p:nvPr/>
+        </p:nvPicPr>
+        <p:blipFill>
+          <a:blip r:embed="rId3">
+            <a:extLst>
+              <a:ext uri="{28A0092B-C50C-407E-A947-70E740481C1C}">
+                <a14:useLocalDpi xmlns:a14="http://schemas.microsoft.com/office/drawing/2010/main" val="0"/>
+              </a:ext>
+            </a:extLst>
+          </a:blip>
+          <a:srcRect/>
+          <a:stretch>
+            <a:fillRect/>
+          </a:stretch>
+        </p:blipFill>
+        <p:spPr bwMode="auto">
+          <a:xfrm>
+            <a:off x="4340664" y="0"/>
+            <a:ext cx="4194175" cy="2468880"/>
+          </a:xfrm>
+          <a:prstGeom prst="rect">
+            <a:avLst/>
+          </a:prstGeom>
+          <a:noFill/>
+        </p:spPr>
+      </p:pic>
+      <p:pic>
+        <p:nvPicPr>
+          <p:cNvPr id="16" name="Picture 15">
+            <a:extLst>
+              <a:ext uri="{FF2B5EF4-FFF2-40B4-BE49-F238E27FC236}">
+                <a16:creationId xmlns:a16="http://schemas.microsoft.com/office/drawing/2014/main" id="{8924B9E2-5E36-E8A1-61A7-DFD913456DCA}"/>
+              </a:ext>
+            </a:extLst>
+          </p:cNvPr>
+          <p:cNvPicPr>
+            <a:picLocks noChangeAspect="1"/>
+          </p:cNvPicPr>
+          <p:nvPr/>
+        </p:nvPicPr>
+        <p:blipFill>
+          <a:blip r:embed="rId4"/>
+          <a:stretch>
+            <a:fillRect/>
+          </a:stretch>
+        </p:blipFill>
+        <p:spPr>
+          <a:xfrm>
+            <a:off x="-6090" y="0"/>
+            <a:ext cx="4346754" cy="2468880"/>
+          </a:xfrm>
+          <a:prstGeom prst="rect">
+            <a:avLst/>
+          </a:prstGeom>
+        </p:spPr>
+      </p:pic>
+      <p:sp>
+        <p:nvSpPr>
+          <p:cNvPr id="17" name="TextBox 16">
+            <a:extLst>
+              <a:ext uri="{FF2B5EF4-FFF2-40B4-BE49-F238E27FC236}">
+                <a16:creationId xmlns:a16="http://schemas.microsoft.com/office/drawing/2014/main" id="{49B3CFF5-7C7E-73D2-F9B8-A7ACB708FEB2}"/>
+              </a:ext>
+            </a:extLst>
+          </p:cNvPr>
+          <p:cNvSpPr txBox="1"/>
+          <p:nvPr/>
+        </p:nvSpPr>
+        <p:spPr>
+          <a:xfrm>
+            <a:off x="0" y="0"/>
+            <a:ext cx="411892" cy="276999"/>
+          </a:xfrm>
+          <a:prstGeom prst="rect">
+            <a:avLst/>
+          </a:prstGeom>
+          <a:noFill/>
+        </p:spPr>
+        <p:txBody>
+          <a:bodyPr wrap="square" rtlCol="0">
+            <a:spAutoFit/>
+          </a:bodyPr>
+          <a:lstStyle/>
+          <a:p>
+            <a:r>
+              <a:rPr lang="en-US" sz="1200" b="1" dirty="0"/>
+              <a:t>a)</a:t>
+            </a:r>
+          </a:p>
+        </p:txBody>
+      </p:sp>
+      <p:sp>
+        <p:nvSpPr>
+          <p:cNvPr id="20" name="TextBox 19">
+            <a:extLst>
+              <a:ext uri="{FF2B5EF4-FFF2-40B4-BE49-F238E27FC236}">
+                <a16:creationId xmlns:a16="http://schemas.microsoft.com/office/drawing/2014/main" id="{9ECB8934-7794-39A8-23C3-C6EFEAA45BB9}"/>
+              </a:ext>
+            </a:extLst>
+          </p:cNvPr>
+          <p:cNvSpPr txBox="1"/>
+          <p:nvPr/>
+        </p:nvSpPr>
+        <p:spPr>
+          <a:xfrm>
+            <a:off x="4340664" y="-5772"/>
+            <a:ext cx="411892" cy="276999"/>
+          </a:xfrm>
+          <a:prstGeom prst="rect">
+            <a:avLst/>
+          </a:prstGeom>
+          <a:noFill/>
+        </p:spPr>
+        <p:txBody>
+          <a:bodyPr wrap="square" rtlCol="0">
+            <a:spAutoFit/>
+          </a:bodyPr>
+          <a:lstStyle/>
+          <a:p>
+            <a:r>
+              <a:rPr lang="en-US" sz="1200" b="1" dirty="0"/>
+              <a:t>b)</a:t>
+            </a:r>
+          </a:p>
+        </p:txBody>
+      </p:sp>
+      <p:sp>
+        <p:nvSpPr>
+          <p:cNvPr id="22" name="TextBox 21">
+            <a:extLst>
+              <a:ext uri="{FF2B5EF4-FFF2-40B4-BE49-F238E27FC236}">
+                <a16:creationId xmlns:a16="http://schemas.microsoft.com/office/drawing/2014/main" id="{89FFB92D-E72C-3B79-B889-D459FB78CCA1}"/>
+              </a:ext>
+            </a:extLst>
+          </p:cNvPr>
+          <p:cNvSpPr txBox="1"/>
+          <p:nvPr/>
+        </p:nvSpPr>
+        <p:spPr>
+          <a:xfrm>
+            <a:off x="-6090" y="2512535"/>
+            <a:ext cx="411892" cy="276999"/>
+          </a:xfrm>
+          <a:prstGeom prst="rect">
+            <a:avLst/>
+          </a:prstGeom>
+          <a:noFill/>
+        </p:spPr>
+        <p:txBody>
+          <a:bodyPr wrap="square" rtlCol="0">
+            <a:spAutoFit/>
+          </a:bodyPr>
+          <a:lstStyle/>
+          <a:p>
+            <a:r>
+              <a:rPr lang="en-US" sz="1200" b="1" dirty="0"/>
+              <a:t>c)</a:t>
+            </a:r>
+          </a:p>
+        </p:txBody>
+      </p:sp>
+    </p:spTree>
+    <p:extLst>
+      <p:ext uri="{BB962C8B-B14F-4D97-AF65-F5344CB8AC3E}">
+        <p14:creationId xmlns:p14="http://schemas.microsoft.com/office/powerpoint/2010/main" val="2980240319"/>
+      </p:ext>
+    </p:extLst>
+  </p:cSld>
+  <p:clrMapOvr>
+    <a:masterClrMapping/>
+  </p:clrMapOvr>
+</p:sld>
+</file>
+
+<file path=ppt/slides/slide9.xml><?xml version="1.0" encoding="utf-8"?>
+<p:sld xmlns:a="http://schemas.openxmlformats.org/drawingml/2006/main" xmlns:r="http://schemas.openxmlformats.org/officeDocument/2006/relationships" xmlns:p="http://schemas.openxmlformats.org/presentationml/2006/main">
+  <p:cSld>
+    <p:spTree>
+      <p:nvGrpSpPr>
+        <p:cNvPr id="1" name=""/>
+        <p:cNvGrpSpPr/>
+        <p:nvPr/>
+      </p:nvGrpSpPr>
+      <p:grpSpPr>
+        <a:xfrm>
+          <a:off x="0" y="0"/>
+          <a:ext cx="0" cy="0"/>
+          <a:chOff x="0" y="0"/>
+          <a:chExt cx="0" cy="0"/>
+        </a:xfrm>
+      </p:grpSpPr>
+      <p:pic>
+        <p:nvPicPr>
+          <p:cNvPr id="5" name="Picture 4">
+            <a:extLst>
+              <a:ext uri="{FF2B5EF4-FFF2-40B4-BE49-F238E27FC236}">
+                <a16:creationId xmlns:a16="http://schemas.microsoft.com/office/drawing/2014/main" id="{A8184DE6-7F49-D476-749D-50D2E8E67BF4}"/>
+              </a:ext>
+            </a:extLst>
+          </p:cNvPr>
+          <p:cNvPicPr>
+            <a:picLocks noChangeAspect="1"/>
+          </p:cNvPicPr>
+          <p:nvPr/>
+        </p:nvPicPr>
+        <p:blipFill>
+          <a:blip r:embed="rId2"/>
+          <a:stretch>
+            <a:fillRect/>
+          </a:stretch>
+        </p:blipFill>
+        <p:spPr>
+          <a:xfrm>
+            <a:off x="0" y="0"/>
+            <a:ext cx="6985686" cy="1974434"/>
+          </a:xfrm>
+          <a:prstGeom prst="rect">
+            <a:avLst/>
+          </a:prstGeom>
+        </p:spPr>
+      </p:pic>
+      <p:pic>
+        <p:nvPicPr>
+          <p:cNvPr id="9" name="Picture 8">
+            <a:extLst>
+              <a:ext uri="{FF2B5EF4-FFF2-40B4-BE49-F238E27FC236}">
+                <a16:creationId xmlns:a16="http://schemas.microsoft.com/office/drawing/2014/main" id="{BFE9C71C-9825-DB4E-8868-7A4CBD4B5831}"/>
+              </a:ext>
+            </a:extLst>
+          </p:cNvPr>
+          <p:cNvPicPr>
+            <a:picLocks noChangeAspect="1"/>
+          </p:cNvPicPr>
+          <p:nvPr/>
+        </p:nvPicPr>
+        <p:blipFill>
+          <a:blip r:embed="rId3"/>
+          <a:srcRect t="546"/>
+          <a:stretch>
+            <a:fillRect/>
+          </a:stretch>
+        </p:blipFill>
+        <p:spPr>
+          <a:xfrm>
+            <a:off x="0" y="1974474"/>
+            <a:ext cx="6985686" cy="1501222"/>
+          </a:xfrm>
+          <a:prstGeom prst="rect">
+            <a:avLst/>
+          </a:prstGeom>
+        </p:spPr>
+      </p:pic>
+      <p:pic>
+        <p:nvPicPr>
+          <p:cNvPr id="11" name="Picture 10">
+            <a:extLst>
+              <a:ext uri="{FF2B5EF4-FFF2-40B4-BE49-F238E27FC236}">
+                <a16:creationId xmlns:a16="http://schemas.microsoft.com/office/drawing/2014/main" id="{3CB35475-8EA3-5829-7DA5-66975387840F}"/>
+              </a:ext>
+            </a:extLst>
+          </p:cNvPr>
+          <p:cNvPicPr>
+            <a:picLocks noChangeAspect="1"/>
+          </p:cNvPicPr>
+          <p:nvPr/>
+        </p:nvPicPr>
+        <p:blipFill>
+          <a:blip r:embed="rId4"/>
+          <a:srcRect t="-337"/>
+          <a:stretch>
+            <a:fillRect/>
+          </a:stretch>
+        </p:blipFill>
+        <p:spPr>
+          <a:xfrm>
+            <a:off x="0" y="3483864"/>
+            <a:ext cx="6985686" cy="1506286"/>
+          </a:xfrm>
+          <a:prstGeom prst="rect">
+            <a:avLst/>
+          </a:prstGeom>
+        </p:spPr>
+      </p:pic>
+      <p:pic>
+        <p:nvPicPr>
+          <p:cNvPr id="13" name="Picture 12">
+            <a:extLst>
+              <a:ext uri="{FF2B5EF4-FFF2-40B4-BE49-F238E27FC236}">
+                <a16:creationId xmlns:a16="http://schemas.microsoft.com/office/drawing/2014/main" id="{33AA247F-344F-AEAF-F736-5A9B339DB0C4}"/>
+              </a:ext>
+            </a:extLst>
+          </p:cNvPr>
+          <p:cNvPicPr>
+            <a:picLocks noChangeAspect="1"/>
+          </p:cNvPicPr>
+          <p:nvPr/>
+        </p:nvPicPr>
+        <p:blipFill>
+          <a:blip r:embed="rId5"/>
+          <a:stretch>
+            <a:fillRect/>
+          </a:stretch>
+        </p:blipFill>
+        <p:spPr>
+          <a:xfrm>
+            <a:off x="0" y="4985126"/>
+            <a:ext cx="6985686" cy="1481206"/>
+          </a:xfrm>
+          <a:prstGeom prst="rect">
+            <a:avLst/>
+          </a:prstGeom>
+        </p:spPr>
+      </p:pic>
+      <p:pic>
+        <p:nvPicPr>
+          <p:cNvPr id="17" name="Picture 16">
+            <a:extLst>
+              <a:ext uri="{FF2B5EF4-FFF2-40B4-BE49-F238E27FC236}">
+                <a16:creationId xmlns:a16="http://schemas.microsoft.com/office/drawing/2014/main" id="{21DDDF53-6F77-5A90-B7E1-D708D77B70E5}"/>
+              </a:ext>
+            </a:extLst>
+          </p:cNvPr>
+          <p:cNvPicPr>
+            <a:picLocks noChangeAspect="1"/>
+          </p:cNvPicPr>
+          <p:nvPr/>
+        </p:nvPicPr>
+        <p:blipFill>
+          <a:blip r:embed="rId2"/>
+          <a:srcRect l="67862" r="31483"/>
+          <a:stretch>
+            <a:fillRect/>
+          </a:stretch>
+        </p:blipFill>
+        <p:spPr>
+          <a:xfrm>
+            <a:off x="6939967" y="0"/>
+            <a:ext cx="45719" cy="1974434"/>
+          </a:xfrm>
+          <a:prstGeom prst="rect">
+            <a:avLst/>
+          </a:prstGeom>
+        </p:spPr>
+      </p:pic>
+      <p:sp>
+        <p:nvSpPr>
+          <p:cNvPr id="19" name="TextBox 18">
+            <a:extLst>
+              <a:ext uri="{FF2B5EF4-FFF2-40B4-BE49-F238E27FC236}">
+                <a16:creationId xmlns:a16="http://schemas.microsoft.com/office/drawing/2014/main" id="{7130B795-5519-3DE4-B230-D7219BFC6C8A}"/>
+              </a:ext>
+            </a:extLst>
+          </p:cNvPr>
+          <p:cNvSpPr txBox="1"/>
+          <p:nvPr/>
+        </p:nvSpPr>
+        <p:spPr>
+          <a:xfrm>
+            <a:off x="-64763" y="359792"/>
+            <a:ext cx="411892" cy="276999"/>
+          </a:xfrm>
+          <a:prstGeom prst="rect">
+            <a:avLst/>
+          </a:prstGeom>
+          <a:noFill/>
+        </p:spPr>
+        <p:txBody>
+          <a:bodyPr wrap="square" rtlCol="0">
+            <a:spAutoFit/>
+          </a:bodyPr>
+          <a:lstStyle/>
+          <a:p>
+            <a:r>
+              <a:rPr lang="en-US" sz="1200" b="1" dirty="0"/>
+              <a:t>a)</a:t>
+            </a:r>
+          </a:p>
+        </p:txBody>
+      </p:sp>
+      <p:sp>
+        <p:nvSpPr>
+          <p:cNvPr id="21" name="TextBox 20">
+            <a:extLst>
+              <a:ext uri="{FF2B5EF4-FFF2-40B4-BE49-F238E27FC236}">
+                <a16:creationId xmlns:a16="http://schemas.microsoft.com/office/drawing/2014/main" id="{19C371E6-A49A-AC37-6815-7FE28499884F}"/>
+              </a:ext>
+            </a:extLst>
+          </p:cNvPr>
+          <p:cNvSpPr txBox="1"/>
+          <p:nvPr/>
+        </p:nvSpPr>
+        <p:spPr>
+          <a:xfrm>
+            <a:off x="-64763" y="1861054"/>
+            <a:ext cx="411892" cy="276999"/>
+          </a:xfrm>
+          <a:prstGeom prst="rect">
+            <a:avLst/>
+          </a:prstGeom>
+          <a:noFill/>
+        </p:spPr>
+        <p:txBody>
+          <a:bodyPr wrap="square" rtlCol="0">
+            <a:spAutoFit/>
+          </a:bodyPr>
+          <a:lstStyle/>
+          <a:p>
+            <a:r>
+              <a:rPr lang="en-US" sz="1200" b="1" dirty="0"/>
+              <a:t>b)</a:t>
+            </a:r>
+          </a:p>
+        </p:txBody>
+      </p:sp>
+      <p:sp>
+        <p:nvSpPr>
+          <p:cNvPr id="23" name="TextBox 22">
+            <a:extLst>
+              <a:ext uri="{FF2B5EF4-FFF2-40B4-BE49-F238E27FC236}">
+                <a16:creationId xmlns:a16="http://schemas.microsoft.com/office/drawing/2014/main" id="{45B63DC8-900E-DDCD-C0FA-2BA676249749}"/>
+              </a:ext>
+            </a:extLst>
+          </p:cNvPr>
+          <p:cNvSpPr txBox="1"/>
+          <p:nvPr/>
+        </p:nvSpPr>
+        <p:spPr>
+          <a:xfrm>
+            <a:off x="-64763" y="3414922"/>
+            <a:ext cx="411892" cy="276999"/>
+          </a:xfrm>
+          <a:prstGeom prst="rect">
+            <a:avLst/>
+          </a:prstGeom>
+          <a:noFill/>
+        </p:spPr>
+        <p:txBody>
+          <a:bodyPr wrap="square" rtlCol="0">
+            <a:spAutoFit/>
+          </a:bodyPr>
+          <a:lstStyle/>
+          <a:p>
+            <a:r>
+              <a:rPr lang="en-US" sz="1200" b="1" dirty="0"/>
+              <a:t>c)</a:t>
+            </a:r>
+          </a:p>
+        </p:txBody>
+      </p:sp>
+      <p:sp>
+        <p:nvSpPr>
+          <p:cNvPr id="25" name="TextBox 24">
+            <a:extLst>
+              <a:ext uri="{FF2B5EF4-FFF2-40B4-BE49-F238E27FC236}">
+                <a16:creationId xmlns:a16="http://schemas.microsoft.com/office/drawing/2014/main" id="{CF6A5C3C-73DB-E283-5918-09021877BC19}"/>
+              </a:ext>
+            </a:extLst>
+          </p:cNvPr>
+          <p:cNvSpPr txBox="1"/>
+          <p:nvPr/>
+        </p:nvSpPr>
+        <p:spPr>
+          <a:xfrm>
+            <a:off x="-64763" y="4924352"/>
+            <a:ext cx="411892" cy="276999"/>
+          </a:xfrm>
+          <a:prstGeom prst="rect">
+            <a:avLst/>
+          </a:prstGeom>
+          <a:noFill/>
+        </p:spPr>
+        <p:txBody>
+          <a:bodyPr wrap="square" rtlCol="0">
+            <a:spAutoFit/>
+          </a:bodyPr>
+          <a:lstStyle/>
+          <a:p>
+            <a:r>
+              <a:rPr lang="en-US" sz="1200" b="1" dirty="0"/>
+              <a:t>d)</a:t>
+            </a:r>
+          </a:p>
+        </p:txBody>
+      </p:sp>
+    </p:spTree>
+    <p:extLst>
+      <p:ext uri="{BB962C8B-B14F-4D97-AF65-F5344CB8AC3E}">
+        <p14:creationId xmlns:p14="http://schemas.microsoft.com/office/powerpoint/2010/main" val="2803045952"/>
       </p:ext>
     </p:extLst>
   </p:cSld>
